--- a/public/lessons/year-6-maths/autumn/week-7/choose-an-efficient-calculation-method/teaching-powerpoint-v1.pptx
+++ b/public/lessons/year-6-maths/autumn/week-7/choose-an-efficient-calculation-method/teaching-powerpoint-v1.pptx
@@ -2,24 +2,24 @@
 <file path=ppt/presentation.xml><?xml version="1.0" encoding="utf-8"?>
 <p:presentation xmlns:p="http://schemas.openxmlformats.org/presentationml/2006/main">
   <p:sldMasterIdLst>
-    <p:sldMasterId xmlns:r="http://schemas.openxmlformats.org/officeDocument/2006/relationships" id="2147483648" r:id="R65c9fde180a446b9"/>
+    <p:sldMasterId xmlns:r="http://schemas.openxmlformats.org/officeDocument/2006/relationships" id="2147483648" r:id="Rd5dfc48b57414389"/>
   </p:sldMasterIdLst>
   <p:notesMasterIdLst>
-    <p:notesMasterId xmlns:r="http://schemas.openxmlformats.org/officeDocument/2006/relationships" r:id="R8ac2a4309fe147f7"/>
+    <p:notesMasterId xmlns:r="http://schemas.openxmlformats.org/officeDocument/2006/relationships" r:id="R4e3586685c954660"/>
   </p:notesMasterIdLst>
   <p:sldIdLst>
-    <p:sldId xmlns:r="http://schemas.openxmlformats.org/officeDocument/2006/relationships" id="256" r:id="R0f6a2eeee8384a11"/>
-    <p:sldId xmlns:r="http://schemas.openxmlformats.org/officeDocument/2006/relationships" id="257" r:id="Rd45aeb4102df46b7"/>
-    <p:sldId xmlns:r="http://schemas.openxmlformats.org/officeDocument/2006/relationships" id="258" r:id="Rf6551dd901c04a23"/>
-    <p:sldId xmlns:r="http://schemas.openxmlformats.org/officeDocument/2006/relationships" id="259" r:id="R5882d2de2d354fc9"/>
-    <p:sldId xmlns:r="http://schemas.openxmlformats.org/officeDocument/2006/relationships" id="260" r:id="R1a8f6040d48b44fc"/>
-    <p:sldId xmlns:r="http://schemas.openxmlformats.org/officeDocument/2006/relationships" id="261" r:id="R79e9c7b98f264094"/>
-    <p:sldId xmlns:r="http://schemas.openxmlformats.org/officeDocument/2006/relationships" id="262" r:id="R64afa1027bca442f"/>
-    <p:sldId xmlns:r="http://schemas.openxmlformats.org/officeDocument/2006/relationships" id="263" r:id="Raa80284180d945a2"/>
-    <p:sldId xmlns:r="http://schemas.openxmlformats.org/officeDocument/2006/relationships" id="264" r:id="Rcc0d5d0904c346fc"/>
-    <p:sldId xmlns:r="http://schemas.openxmlformats.org/officeDocument/2006/relationships" id="265" r:id="R3ab410bd51a74f9f"/>
-    <p:sldId xmlns:r="http://schemas.openxmlformats.org/officeDocument/2006/relationships" id="266" r:id="Rc9ae79d6d1d64b71"/>
-    <p:sldId xmlns:r="http://schemas.openxmlformats.org/officeDocument/2006/relationships" id="267" r:id="Rafb58043892b4862"/>
+    <p:sldId xmlns:r="http://schemas.openxmlformats.org/officeDocument/2006/relationships" id="256" r:id="R67787e0034ef4ca9"/>
+    <p:sldId xmlns:r="http://schemas.openxmlformats.org/officeDocument/2006/relationships" id="257" r:id="R4b5c6731dd0549c4"/>
+    <p:sldId xmlns:r="http://schemas.openxmlformats.org/officeDocument/2006/relationships" id="258" r:id="R99f1fa120fa64bbe"/>
+    <p:sldId xmlns:r="http://schemas.openxmlformats.org/officeDocument/2006/relationships" id="259" r:id="R4c92dd400afb4d1b"/>
+    <p:sldId xmlns:r="http://schemas.openxmlformats.org/officeDocument/2006/relationships" id="260" r:id="R7520cb4b15b4429f"/>
+    <p:sldId xmlns:r="http://schemas.openxmlformats.org/officeDocument/2006/relationships" id="261" r:id="R04514f2818d64049"/>
+    <p:sldId xmlns:r="http://schemas.openxmlformats.org/officeDocument/2006/relationships" id="262" r:id="R8a25ddd62936486c"/>
+    <p:sldId xmlns:r="http://schemas.openxmlformats.org/officeDocument/2006/relationships" id="263" r:id="R34649777a0424e93"/>
+    <p:sldId xmlns:r="http://schemas.openxmlformats.org/officeDocument/2006/relationships" id="264" r:id="R39d9d99f77e34379"/>
+    <p:sldId xmlns:r="http://schemas.openxmlformats.org/officeDocument/2006/relationships" id="265" r:id="R974a1da9111a4ddc"/>
+    <p:sldId xmlns:r="http://schemas.openxmlformats.org/officeDocument/2006/relationships" id="266" r:id="R65d2433136a64a1c"/>
+    <p:sldId xmlns:r="http://schemas.openxmlformats.org/officeDocument/2006/relationships" id="267" r:id="R2acffa4ffb324cdd"/>
   </p:sldIdLst>
   <p:sldSz cx="12192000" cy="6858000"/>
   <p:notesSz cx="6858000" cy="9144000"/>
@@ -873,7 +873,7 @@
           <a:lstStyle xmlns:a="http://schemas.openxmlformats.org/drawingml/2006/main"/>
           <a:p xmlns:a="http://schemas.openxmlformats.org/drawingml/2006/main">
             <a:r>
-              <a:t>I do. Reveal the question, setup and each calculation stage one click at a time. Pupils watch before copying. Model answer: Compensation: 4,000 + 2,507 - 2 = 6,505.</a:t>
+              <a:t>I do. Reveal the question, then reveal each mathematical change one click at a time. Point to the numbers and operation that changed before moving to the next line. Final answer: Compensation: 4,000 + 2,507 - 2 = 6,505.</a:t>
             </a:r>
           </a:p>
         </p:txBody>
@@ -1291,7 +1291,7 @@
   </p:cSld>
   <p:clrMap bg1="lt1" tx1="dk1" bg2="lt2" tx2="dk2" accent1="accent1" accent2="accent2" accent3="accent3" accent4="accent4" accent5="accent5" accent6="accent6" hlink="hlink" folHlink="folHlink"/>
   <p:sldLayoutIdLst>
-    <p:sldLayoutId xmlns:r="http://schemas.openxmlformats.org/officeDocument/2006/relationships" id="2147483649" r:id="Rccd6b541630e4992"/>
+    <p:sldLayoutId xmlns:r="http://schemas.openxmlformats.org/officeDocument/2006/relationships" id="2147483649" r:id="Rf5ae62387f4d486d"/>
   </p:sldLayoutIdLst>
   <p:txStyles>
     <p:titleStyle>
@@ -1842,7 +1842,7 @@
           <p:cNvPr id="12" name="">
             <a:extLst xmlns:a="http://schemas.openxmlformats.org/drawingml/2006/main">
               <a:ext uri="{FF2B5EF4-FFF2-40B4-BE49-F238E27FC236}">
-                <a16:creationId xmlns:a16="http://schemas.microsoft.com/office/drawing/2014/main" id="{21E4405D-FB1F-4364-93BD-581E110B4E41}"/>
+                <a16:creationId xmlns:a16="http://schemas.microsoft.com/office/drawing/2014/main" id="{CDA10058-C2AD-4982-B149-D3951A553BD4}"/>
               </a:ext>
             </a:extLst>
           </p:cNvPr>
@@ -1874,7 +1874,7 @@
           <p:cNvPr id="2" name="">
             <a:extLst xmlns:a="http://schemas.openxmlformats.org/drawingml/2006/main">
               <a:ext uri="{FF2B5EF4-FFF2-40B4-BE49-F238E27FC236}">
-                <a16:creationId xmlns:a16="http://schemas.microsoft.com/office/drawing/2014/main" id="{93194ECD-BD98-4FC0-A14D-0AE2EA2E176F}"/>
+                <a16:creationId xmlns:a16="http://schemas.microsoft.com/office/drawing/2014/main" id="{B5AD6A23-B65E-483A-82A9-6697F29B6A9E}"/>
               </a:ext>
             </a:extLst>
           </p:cNvPr>
@@ -1931,7 +1931,7 @@
           <p:cNvPr id="3" name="">
             <a:extLst xmlns:a="http://schemas.openxmlformats.org/drawingml/2006/main">
               <a:ext uri="{FF2B5EF4-FFF2-40B4-BE49-F238E27FC236}">
-                <a16:creationId xmlns:a16="http://schemas.microsoft.com/office/drawing/2014/main" id="{5C0E28EC-32BC-4800-93D3-9BD3A1ABEA16}"/>
+                <a16:creationId xmlns:a16="http://schemas.microsoft.com/office/drawing/2014/main" id="{0B1024B2-8277-461E-8BA0-EA2162162D87}"/>
               </a:ext>
             </a:extLst>
           </p:cNvPr>
@@ -1965,7 +1965,7 @@
           <p:cNvPr id="4" name="">
             <a:extLst xmlns:a="http://schemas.openxmlformats.org/drawingml/2006/main">
               <a:ext uri="{FF2B5EF4-FFF2-40B4-BE49-F238E27FC236}">
-                <a16:creationId xmlns:a16="http://schemas.microsoft.com/office/drawing/2014/main" id="{C6ABF6A9-ADFB-45B4-841F-722A2FCBA400}"/>
+                <a16:creationId xmlns:a16="http://schemas.microsoft.com/office/drawing/2014/main" id="{201FE9E6-2D7E-4548-8F8F-2E873AB69A5C}"/>
               </a:ext>
             </a:extLst>
           </p:cNvPr>
@@ -2022,7 +2022,7 @@
           <p:cNvPr id="5" name="">
             <a:extLst xmlns:a="http://schemas.openxmlformats.org/drawingml/2006/main">
               <a:ext uri="{FF2B5EF4-FFF2-40B4-BE49-F238E27FC236}">
-                <a16:creationId xmlns:a16="http://schemas.microsoft.com/office/drawing/2014/main" id="{F8A61791-095F-447D-A1A9-6A669D8FEEB6}"/>
+                <a16:creationId xmlns:a16="http://schemas.microsoft.com/office/drawing/2014/main" id="{46BDF59A-C689-43ED-9943-9914626E94CE}"/>
               </a:ext>
             </a:extLst>
           </p:cNvPr>
@@ -2079,7 +2079,7 @@
           <p:cNvPr id="6" name="">
             <a:extLst xmlns:a="http://schemas.openxmlformats.org/drawingml/2006/main">
               <a:ext uri="{FF2B5EF4-FFF2-40B4-BE49-F238E27FC236}">
-                <a16:creationId xmlns:a16="http://schemas.microsoft.com/office/drawing/2014/main" id="{2370EB7F-1166-4595-B19E-C2F42F3D2C04}"/>
+                <a16:creationId xmlns:a16="http://schemas.microsoft.com/office/drawing/2014/main" id="{BCE0EA84-7E09-4496-A7E7-71D3768C7597}"/>
               </a:ext>
             </a:extLst>
           </p:cNvPr>
@@ -2113,7 +2113,7 @@
           <p:cNvPr id="7" name="">
             <a:extLst xmlns:a="http://schemas.openxmlformats.org/drawingml/2006/main">
               <a:ext uri="{FF2B5EF4-FFF2-40B4-BE49-F238E27FC236}">
-                <a16:creationId xmlns:a16="http://schemas.microsoft.com/office/drawing/2014/main" id="{2CBB6AE7-EA6A-478A-97FE-2EF144319540}"/>
+                <a16:creationId xmlns:a16="http://schemas.microsoft.com/office/drawing/2014/main" id="{71A09BCA-7B02-43B5-AA2E-8CAD9524CE82}"/>
               </a:ext>
             </a:extLst>
           </p:cNvPr>
@@ -2170,7 +2170,7 @@
           <p:cNvPr id="8" name="">
             <a:extLst xmlns:a="http://schemas.openxmlformats.org/drawingml/2006/main">
               <a:ext uri="{FF2B5EF4-FFF2-40B4-BE49-F238E27FC236}">
-                <a16:creationId xmlns:a16="http://schemas.microsoft.com/office/drawing/2014/main" id="{29F29B69-E5E5-4D51-858D-8FF07CE9D64A}"/>
+                <a16:creationId xmlns:a16="http://schemas.microsoft.com/office/drawing/2014/main" id="{6CF0848E-E4B6-4D5C-801A-71390CF8EED7}"/>
               </a:ext>
             </a:extLst>
           </p:cNvPr>
@@ -2227,7 +2227,7 @@
           <p:cNvPr id="9" name="">
             <a:extLst xmlns:a="http://schemas.openxmlformats.org/drawingml/2006/main">
               <a:ext uri="{FF2B5EF4-FFF2-40B4-BE49-F238E27FC236}">
-                <a16:creationId xmlns:a16="http://schemas.microsoft.com/office/drawing/2014/main" id="{F44A9246-A8DD-4DF2-95F2-115600B73A66}"/>
+                <a16:creationId xmlns:a16="http://schemas.microsoft.com/office/drawing/2014/main" id="{199070DC-97D0-4C17-9D0D-27B72C33B693}"/>
               </a:ext>
             </a:extLst>
           </p:cNvPr>
@@ -2284,7 +2284,7 @@
           <p:cNvPr id="10" name="">
             <a:extLst xmlns:a="http://schemas.openxmlformats.org/drawingml/2006/main">
               <a:ext uri="{FF2B5EF4-FFF2-40B4-BE49-F238E27FC236}">
-                <a16:creationId xmlns:a16="http://schemas.microsoft.com/office/drawing/2014/main" id="{07DC5D96-FC3D-4AD4-BCFE-69BC9A3D51E1}"/>
+                <a16:creationId xmlns:a16="http://schemas.microsoft.com/office/drawing/2014/main" id="{C74A265F-369D-406A-80A5-DF64F26BA19C}"/>
               </a:ext>
             </a:extLst>
           </p:cNvPr>
@@ -2341,7 +2341,7 @@
           <p:cNvPr id="11" name="">
             <a:extLst xmlns:a="http://schemas.openxmlformats.org/drawingml/2006/main">
               <a:ext uri="{FF2B5EF4-FFF2-40B4-BE49-F238E27FC236}">
-                <a16:creationId xmlns:a16="http://schemas.microsoft.com/office/drawing/2014/main" id="{DDCB3BE6-7D56-479B-BBA4-A115BFBE58B0}"/>
+                <a16:creationId xmlns:a16="http://schemas.microsoft.com/office/drawing/2014/main" id="{C24D142B-35EB-47F5-9214-36754E90377B}"/>
               </a:ext>
             </a:extLst>
           </p:cNvPr>
@@ -2396,7 +2396,7 @@
     </p:spTree>
     <p:extLst>
       <p:ext uri="{BB962C8B-B14F-4D97-AF65-F5344CB8AC3E}">
-        <p14:creationId xmlns:p14="http://schemas.microsoft.com/office/powerpoint/2010/main" val="506424659"/>
+        <p14:creationId xmlns:p14="http://schemas.microsoft.com/office/powerpoint/2010/main" val="1172297407"/>
       </p:ext>
     </p:extLst>
   </p:cSld>
@@ -2427,7 +2427,7 @@
           <p:cNvPr id="14" name="">
             <a:extLst xmlns:a="http://schemas.openxmlformats.org/drawingml/2006/main">
               <a:ext uri="{FF2B5EF4-FFF2-40B4-BE49-F238E27FC236}">
-                <a16:creationId xmlns:a16="http://schemas.microsoft.com/office/drawing/2014/main" id="{D359C53C-30D4-4FB1-8316-86465F1367E8}"/>
+                <a16:creationId xmlns:a16="http://schemas.microsoft.com/office/drawing/2014/main" id="{2CB5F3F6-74FA-4305-9291-8CF641DFF4A0}"/>
               </a:ext>
             </a:extLst>
           </p:cNvPr>
@@ -2459,7 +2459,7 @@
           <p:cNvPr id="2" name="">
             <a:extLst xmlns:a="http://schemas.openxmlformats.org/drawingml/2006/main">
               <a:ext uri="{FF2B5EF4-FFF2-40B4-BE49-F238E27FC236}">
-                <a16:creationId xmlns:a16="http://schemas.microsoft.com/office/drawing/2014/main" id="{9E6170B4-62F5-435E-82B9-093884BE7F50}"/>
+                <a16:creationId xmlns:a16="http://schemas.microsoft.com/office/drawing/2014/main" id="{CAEF7072-B6C9-4D09-B2BB-8754AE06F950}"/>
               </a:ext>
             </a:extLst>
           </p:cNvPr>
@@ -2516,7 +2516,7 @@
           <p:cNvPr id="3" name="">
             <a:extLst xmlns:a="http://schemas.openxmlformats.org/drawingml/2006/main">
               <a:ext uri="{FF2B5EF4-FFF2-40B4-BE49-F238E27FC236}">
-                <a16:creationId xmlns:a16="http://schemas.microsoft.com/office/drawing/2014/main" id="{EA414894-28BB-43DF-BC26-2F1646EC918A}"/>
+                <a16:creationId xmlns:a16="http://schemas.microsoft.com/office/drawing/2014/main" id="{12FF63A7-76BC-4C9A-B056-247B76A025E1}"/>
               </a:ext>
             </a:extLst>
           </p:cNvPr>
@@ -2548,7 +2548,7 @@
           <p:cNvPr id="4" name="">
             <a:extLst xmlns:a="http://schemas.openxmlformats.org/drawingml/2006/main">
               <a:ext uri="{FF2B5EF4-FFF2-40B4-BE49-F238E27FC236}">
-                <a16:creationId xmlns:a16="http://schemas.microsoft.com/office/drawing/2014/main" id="{A2356586-1ED6-4216-895E-4634CB239BE6}"/>
+                <a16:creationId xmlns:a16="http://schemas.microsoft.com/office/drawing/2014/main" id="{19C768B8-AFDD-445A-AD9C-0811C8A5ED67}"/>
               </a:ext>
             </a:extLst>
           </p:cNvPr>
@@ -2605,7 +2605,7 @@
           <p:cNvPr id="5" name="">
             <a:extLst xmlns:a="http://schemas.openxmlformats.org/drawingml/2006/main">
               <a:ext uri="{FF2B5EF4-FFF2-40B4-BE49-F238E27FC236}">
-                <a16:creationId xmlns:a16="http://schemas.microsoft.com/office/drawing/2014/main" id="{722A2AF7-D2C9-4A1C-BC2B-0046276307C3}"/>
+                <a16:creationId xmlns:a16="http://schemas.microsoft.com/office/drawing/2014/main" id="{B9506C9B-B1DB-47B7-9DA5-4893DC2FB830}"/>
               </a:ext>
             </a:extLst>
           </p:cNvPr>
@@ -2662,7 +2662,7 @@
           <p:cNvPr id="6" name="">
             <a:extLst xmlns:a="http://schemas.openxmlformats.org/drawingml/2006/main">
               <a:ext uri="{FF2B5EF4-FFF2-40B4-BE49-F238E27FC236}">
-                <a16:creationId xmlns:a16="http://schemas.microsoft.com/office/drawing/2014/main" id="{A26AF8DE-C121-4824-A84F-38C9E220304C}"/>
+                <a16:creationId xmlns:a16="http://schemas.microsoft.com/office/drawing/2014/main" id="{F5068A95-175A-4FA3-921F-6F71E3813036}"/>
               </a:ext>
             </a:extLst>
           </p:cNvPr>
@@ -2719,7 +2719,7 @@
           <p:cNvPr id="7" name="">
             <a:extLst xmlns:a="http://schemas.openxmlformats.org/drawingml/2006/main">
               <a:ext uri="{FF2B5EF4-FFF2-40B4-BE49-F238E27FC236}">
-                <a16:creationId xmlns:a16="http://schemas.microsoft.com/office/drawing/2014/main" id="{AD392655-9F31-42F5-A04E-40CA28DFDFF5}"/>
+                <a16:creationId xmlns:a16="http://schemas.microsoft.com/office/drawing/2014/main" id="{134DE50E-01BD-440D-8EA1-55C6113CA33B}"/>
               </a:ext>
             </a:extLst>
           </p:cNvPr>
@@ -2751,7 +2751,7 @@
           <p:cNvPr id="8" name="">
             <a:extLst xmlns:a="http://schemas.openxmlformats.org/drawingml/2006/main">
               <a:ext uri="{FF2B5EF4-FFF2-40B4-BE49-F238E27FC236}">
-                <a16:creationId xmlns:a16="http://schemas.microsoft.com/office/drawing/2014/main" id="{0884C28E-1A1E-4FFA-8378-6D405EDF0E6C}"/>
+                <a16:creationId xmlns:a16="http://schemas.microsoft.com/office/drawing/2014/main" id="{5FF7405F-70C6-4AC2-A991-96F0748510EA}"/>
               </a:ext>
             </a:extLst>
           </p:cNvPr>
@@ -2808,7 +2808,7 @@
           <p:cNvPr id="9" name="">
             <a:extLst xmlns:a="http://schemas.openxmlformats.org/drawingml/2006/main">
               <a:ext uri="{FF2B5EF4-FFF2-40B4-BE49-F238E27FC236}">
-                <a16:creationId xmlns:a16="http://schemas.microsoft.com/office/drawing/2014/main" id="{4743F990-4A90-4729-AA70-B11C7F688F03}"/>
+                <a16:creationId xmlns:a16="http://schemas.microsoft.com/office/drawing/2014/main" id="{63516134-2D5D-4F2A-88BE-AF43AC09B662}"/>
               </a:ext>
             </a:extLst>
           </p:cNvPr>
@@ -2865,7 +2865,7 @@
           <p:cNvPr id="10" name="">
             <a:extLst xmlns:a="http://schemas.openxmlformats.org/drawingml/2006/main">
               <a:ext uri="{FF2B5EF4-FFF2-40B4-BE49-F238E27FC236}">
-                <a16:creationId xmlns:a16="http://schemas.microsoft.com/office/drawing/2014/main" id="{81CDB37A-35DE-4CB0-B518-593A8D96EC8F}"/>
+                <a16:creationId xmlns:a16="http://schemas.microsoft.com/office/drawing/2014/main" id="{23F70FC2-6B3E-4D46-B2E4-198DD3D88B8B}"/>
               </a:ext>
             </a:extLst>
           </p:cNvPr>
@@ -2922,7 +2922,7 @@
           <p:cNvPr id="11" name="">
             <a:extLst xmlns:a="http://schemas.openxmlformats.org/drawingml/2006/main">
               <a:ext uri="{FF2B5EF4-FFF2-40B4-BE49-F238E27FC236}">
-                <a16:creationId xmlns:a16="http://schemas.microsoft.com/office/drawing/2014/main" id="{3E3A41AD-B8FE-4EA1-AB66-37DB8E850611}"/>
+                <a16:creationId xmlns:a16="http://schemas.microsoft.com/office/drawing/2014/main" id="{1DB66875-E613-4E8E-8B33-FF0A9D93EA46}"/>
               </a:ext>
             </a:extLst>
           </p:cNvPr>
@@ -2979,7 +2979,7 @@
           <p:cNvPr id="12" name="">
             <a:extLst xmlns:a="http://schemas.openxmlformats.org/drawingml/2006/main">
               <a:ext uri="{FF2B5EF4-FFF2-40B4-BE49-F238E27FC236}">
-                <a16:creationId xmlns:a16="http://schemas.microsoft.com/office/drawing/2014/main" id="{FF2C2430-D42E-41C7-859E-6D6B6F0C70CB}"/>
+                <a16:creationId xmlns:a16="http://schemas.microsoft.com/office/drawing/2014/main" id="{A86AB532-69B0-4440-B7F1-AE31C9AA65A5}"/>
               </a:ext>
             </a:extLst>
           </p:cNvPr>
@@ -3036,7 +3036,7 @@
           <p:cNvPr id="13" name="">
             <a:extLst xmlns:a="http://schemas.openxmlformats.org/drawingml/2006/main">
               <a:ext uri="{FF2B5EF4-FFF2-40B4-BE49-F238E27FC236}">
-                <a16:creationId xmlns:a16="http://schemas.microsoft.com/office/drawing/2014/main" id="{B6CC6975-0A24-411C-BC31-2B4A5FED62B6}"/>
+                <a16:creationId xmlns:a16="http://schemas.microsoft.com/office/drawing/2014/main" id="{4D31394D-40E3-4754-A075-AC3024D3D7E0}"/>
               </a:ext>
             </a:extLst>
           </p:cNvPr>
@@ -3091,7 +3091,7 @@
     </p:spTree>
     <p:extLst>
       <p:ext uri="{BB962C8B-B14F-4D97-AF65-F5344CB8AC3E}">
-        <p14:creationId xmlns:p14="http://schemas.microsoft.com/office/powerpoint/2010/main" val="11038719"/>
+        <p14:creationId xmlns:p14="http://schemas.microsoft.com/office/powerpoint/2010/main" val="1882241985"/>
       </p:ext>
     </p:extLst>
   </p:cSld>
@@ -3292,7 +3292,7 @@
           <p:cNvPr id="19" name="">
             <a:extLst xmlns:a="http://schemas.openxmlformats.org/drawingml/2006/main">
               <a:ext uri="{FF2B5EF4-FFF2-40B4-BE49-F238E27FC236}">
-                <a16:creationId xmlns:a16="http://schemas.microsoft.com/office/drawing/2014/main" id="{A494F7BB-82DB-4C08-B7DC-239E25D93B72}"/>
+                <a16:creationId xmlns:a16="http://schemas.microsoft.com/office/drawing/2014/main" id="{5F955261-5B82-4662-AECE-CE8A618A2EED}"/>
               </a:ext>
             </a:extLst>
           </p:cNvPr>
@@ -3324,7 +3324,7 @@
           <p:cNvPr id="2" name="">
             <a:extLst xmlns:a="http://schemas.openxmlformats.org/drawingml/2006/main">
               <a:ext uri="{FF2B5EF4-FFF2-40B4-BE49-F238E27FC236}">
-                <a16:creationId xmlns:a16="http://schemas.microsoft.com/office/drawing/2014/main" id="{6B67182D-F174-4EC7-BF34-D50B84734EC6}"/>
+                <a16:creationId xmlns:a16="http://schemas.microsoft.com/office/drawing/2014/main" id="{36EB13A6-7127-455F-AE81-087549D83820}"/>
               </a:ext>
             </a:extLst>
           </p:cNvPr>
@@ -3381,7 +3381,7 @@
           <p:cNvPr id="3" name="">
             <a:extLst xmlns:a="http://schemas.openxmlformats.org/drawingml/2006/main">
               <a:ext uri="{FF2B5EF4-FFF2-40B4-BE49-F238E27FC236}">
-                <a16:creationId xmlns:a16="http://schemas.microsoft.com/office/drawing/2014/main" id="{E29653E1-C723-4E8A-8B8A-6AEEF6069798}"/>
+                <a16:creationId xmlns:a16="http://schemas.microsoft.com/office/drawing/2014/main" id="{CDC1F8D8-E7BB-485E-9438-7F3F4367320D}"/>
               </a:ext>
             </a:extLst>
           </p:cNvPr>
@@ -3413,7 +3413,7 @@
           <p:cNvPr id="4" name="">
             <a:extLst xmlns:a="http://schemas.openxmlformats.org/drawingml/2006/main">
               <a:ext uri="{FF2B5EF4-FFF2-40B4-BE49-F238E27FC236}">
-                <a16:creationId xmlns:a16="http://schemas.microsoft.com/office/drawing/2014/main" id="{FF6BB9D7-76AC-4C05-A561-58EC79402243}"/>
+                <a16:creationId xmlns:a16="http://schemas.microsoft.com/office/drawing/2014/main" id="{208A80CF-DE69-4CFA-BAC4-1DE7B3892E0F}"/>
               </a:ext>
             </a:extLst>
           </p:cNvPr>
@@ -3470,7 +3470,7 @@
           <p:cNvPr id="5" name="">
             <a:extLst xmlns:a="http://schemas.openxmlformats.org/drawingml/2006/main">
               <a:ext uri="{FF2B5EF4-FFF2-40B4-BE49-F238E27FC236}">
-                <a16:creationId xmlns:a16="http://schemas.microsoft.com/office/drawing/2014/main" id="{FD533457-64E7-4FD5-8403-1D0DBD14BB44}"/>
+                <a16:creationId xmlns:a16="http://schemas.microsoft.com/office/drawing/2014/main" id="{22736638-9973-49D5-BB36-E86D28B4BDDF}"/>
               </a:ext>
             </a:extLst>
           </p:cNvPr>
@@ -3527,7 +3527,7 @@
           <p:cNvPr id="6" name="">
             <a:extLst xmlns:a="http://schemas.openxmlformats.org/drawingml/2006/main">
               <a:ext uri="{FF2B5EF4-FFF2-40B4-BE49-F238E27FC236}">
-                <a16:creationId xmlns:a16="http://schemas.microsoft.com/office/drawing/2014/main" id="{EB0FB3E2-E920-4AEE-AA65-8D43F16D4B7E}"/>
+                <a16:creationId xmlns:a16="http://schemas.microsoft.com/office/drawing/2014/main" id="{BFBCDB23-8171-4CAF-93C4-D16897C60A1E}"/>
               </a:ext>
             </a:extLst>
           </p:cNvPr>
@@ -3584,7 +3584,7 @@
           <p:cNvPr id="7" name="">
             <a:extLst xmlns:a="http://schemas.openxmlformats.org/drawingml/2006/main">
               <a:ext uri="{FF2B5EF4-FFF2-40B4-BE49-F238E27FC236}">
-                <a16:creationId xmlns:a16="http://schemas.microsoft.com/office/drawing/2014/main" id="{3E4C60AB-1B9C-48DB-857D-A6A367016D67}"/>
+                <a16:creationId xmlns:a16="http://schemas.microsoft.com/office/drawing/2014/main" id="{47EC7193-E295-401D-ADD1-ACCBE76AC76F}"/>
               </a:ext>
             </a:extLst>
           </p:cNvPr>
@@ -3616,7 +3616,7 @@
           <p:cNvPr id="8" name="">
             <a:extLst xmlns:a="http://schemas.openxmlformats.org/drawingml/2006/main">
               <a:ext uri="{FF2B5EF4-FFF2-40B4-BE49-F238E27FC236}">
-                <a16:creationId xmlns:a16="http://schemas.microsoft.com/office/drawing/2014/main" id="{A8C57FAC-398C-4CB5-B18F-15A192C9C40E}"/>
+                <a16:creationId xmlns:a16="http://schemas.microsoft.com/office/drawing/2014/main" id="{1F5ED383-886C-4968-BC1E-133CFDB3A3BE}"/>
               </a:ext>
             </a:extLst>
           </p:cNvPr>
@@ -3673,7 +3673,7 @@
           <p:cNvPr id="9" name="">
             <a:extLst xmlns:a="http://schemas.openxmlformats.org/drawingml/2006/main">
               <a:ext uri="{FF2B5EF4-FFF2-40B4-BE49-F238E27FC236}">
-                <a16:creationId xmlns:a16="http://schemas.microsoft.com/office/drawing/2014/main" id="{D6B072DE-E7D0-4637-B2CE-C5E6D52B4A66}"/>
+                <a16:creationId xmlns:a16="http://schemas.microsoft.com/office/drawing/2014/main" id="{6D74C7F2-F5D1-4D8F-A6EA-88691DB733FC}"/>
               </a:ext>
             </a:extLst>
           </p:cNvPr>
@@ -3730,7 +3730,7 @@
           <p:cNvPr id="10" name="">
             <a:extLst xmlns:a="http://schemas.openxmlformats.org/drawingml/2006/main">
               <a:ext uri="{FF2B5EF4-FFF2-40B4-BE49-F238E27FC236}">
-                <a16:creationId xmlns:a16="http://schemas.microsoft.com/office/drawing/2014/main" id="{E446C45A-89BF-4180-9B1A-FDDBF6C76442}"/>
+                <a16:creationId xmlns:a16="http://schemas.microsoft.com/office/drawing/2014/main" id="{6B48196C-2B8D-442A-83D8-8F5C18AA0755}"/>
               </a:ext>
             </a:extLst>
           </p:cNvPr>
@@ -3787,7 +3787,7 @@
           <p:cNvPr id="11" name="">
             <a:extLst xmlns:a="http://schemas.openxmlformats.org/drawingml/2006/main">
               <a:ext uri="{FF2B5EF4-FFF2-40B4-BE49-F238E27FC236}">
-                <a16:creationId xmlns:a16="http://schemas.microsoft.com/office/drawing/2014/main" id="{779BDF72-08BC-48FB-8F7E-4CF9FD6EA7F7}"/>
+                <a16:creationId xmlns:a16="http://schemas.microsoft.com/office/drawing/2014/main" id="{3F10C09F-5DC1-4EC9-9764-4CDA83A55B8A}"/>
               </a:ext>
             </a:extLst>
           </p:cNvPr>
@@ -3821,7 +3821,7 @@
           <p:cNvPr id="12" name="">
             <a:extLst xmlns:a="http://schemas.openxmlformats.org/drawingml/2006/main">
               <a:ext uri="{FF2B5EF4-FFF2-40B4-BE49-F238E27FC236}">
-                <a16:creationId xmlns:a16="http://schemas.microsoft.com/office/drawing/2014/main" id="{660399D2-9B46-47BD-AA8D-0A6E37CFDE87}"/>
+                <a16:creationId xmlns:a16="http://schemas.microsoft.com/office/drawing/2014/main" id="{2FBA6708-F5BC-4A20-B816-D9D2A58BE0E3}"/>
               </a:ext>
             </a:extLst>
           </p:cNvPr>
@@ -3878,7 +3878,7 @@
           <p:cNvPr id="13" name="">
             <a:extLst xmlns:a="http://schemas.openxmlformats.org/drawingml/2006/main">
               <a:ext uri="{FF2B5EF4-FFF2-40B4-BE49-F238E27FC236}">
-                <a16:creationId xmlns:a16="http://schemas.microsoft.com/office/drawing/2014/main" id="{CB489663-08D9-4DD1-9E46-EB8C404A4FB0}"/>
+                <a16:creationId xmlns:a16="http://schemas.microsoft.com/office/drawing/2014/main" id="{9D3D0998-6AAF-4F86-AF83-3610261ADCE6}"/>
               </a:ext>
             </a:extLst>
           </p:cNvPr>
@@ -3935,7 +3935,7 @@
           <p:cNvPr id="14" name="">
             <a:extLst xmlns:a="http://schemas.openxmlformats.org/drawingml/2006/main">
               <a:ext uri="{FF2B5EF4-FFF2-40B4-BE49-F238E27FC236}">
-                <a16:creationId xmlns:a16="http://schemas.microsoft.com/office/drawing/2014/main" id="{3F6307E4-5C03-4B59-AFBD-F89E898DA4CB}"/>
+                <a16:creationId xmlns:a16="http://schemas.microsoft.com/office/drawing/2014/main" id="{D1BFDC6D-AFE2-4B1F-81E7-58420BA5DA7F}"/>
               </a:ext>
             </a:extLst>
           </p:cNvPr>
@@ -3992,7 +3992,7 @@
           <p:cNvPr id="15" name="">
             <a:extLst xmlns:a="http://schemas.openxmlformats.org/drawingml/2006/main">
               <a:ext uri="{FF2B5EF4-FFF2-40B4-BE49-F238E27FC236}">
-                <a16:creationId xmlns:a16="http://schemas.microsoft.com/office/drawing/2014/main" id="{AACC306B-9C7A-47A4-9EF6-B3337E2559FF}"/>
+                <a16:creationId xmlns:a16="http://schemas.microsoft.com/office/drawing/2014/main" id="{AB1DEEC6-C672-4BC7-B5E5-78FAF86922CC}"/>
               </a:ext>
             </a:extLst>
           </p:cNvPr>
@@ -4026,7 +4026,7 @@
           <p:cNvPr id="16" name="">
             <a:extLst xmlns:a="http://schemas.openxmlformats.org/drawingml/2006/main">
               <a:ext uri="{FF2B5EF4-FFF2-40B4-BE49-F238E27FC236}">
-                <a16:creationId xmlns:a16="http://schemas.microsoft.com/office/drawing/2014/main" id="{C7FC4541-1DC0-4905-8E66-AEC843B89F42}"/>
+                <a16:creationId xmlns:a16="http://schemas.microsoft.com/office/drawing/2014/main" id="{E6C3FB2D-B436-404A-8E45-D64AA1AB5FA3}"/>
               </a:ext>
             </a:extLst>
           </p:cNvPr>
@@ -4083,7 +4083,7 @@
           <p:cNvPr id="17" name="">
             <a:extLst xmlns:a="http://schemas.openxmlformats.org/drawingml/2006/main">
               <a:ext uri="{FF2B5EF4-FFF2-40B4-BE49-F238E27FC236}">
-                <a16:creationId xmlns:a16="http://schemas.microsoft.com/office/drawing/2014/main" id="{D5234A1F-9C31-40A8-A0BD-EF900F6C4959}"/>
+                <a16:creationId xmlns:a16="http://schemas.microsoft.com/office/drawing/2014/main" id="{662ADC63-F8DF-41B7-847E-11A741F4191C}"/>
               </a:ext>
             </a:extLst>
           </p:cNvPr>
@@ -4140,7 +4140,7 @@
           <p:cNvPr id="18" name="">
             <a:extLst xmlns:a="http://schemas.openxmlformats.org/drawingml/2006/main">
               <a:ext uri="{FF2B5EF4-FFF2-40B4-BE49-F238E27FC236}">
-                <a16:creationId xmlns:a16="http://schemas.microsoft.com/office/drawing/2014/main" id="{C3252F2F-453F-479B-B279-79A03D58D1CA}"/>
+                <a16:creationId xmlns:a16="http://schemas.microsoft.com/office/drawing/2014/main" id="{CA88B68E-6C1D-40F5-BB06-333156FA8422}"/>
               </a:ext>
             </a:extLst>
           </p:cNvPr>
@@ -4195,7 +4195,7 @@
     </p:spTree>
     <p:extLst>
       <p:ext uri="{BB962C8B-B14F-4D97-AF65-F5344CB8AC3E}">
-        <p14:creationId xmlns:p14="http://schemas.microsoft.com/office/powerpoint/2010/main" val="1786452204"/>
+        <p14:creationId xmlns:p14="http://schemas.microsoft.com/office/powerpoint/2010/main" val="168406814"/>
       </p:ext>
     </p:extLst>
   </p:cSld>
@@ -4350,7 +4350,7 @@
           <p:cNvPr id="23" name="">
             <a:extLst xmlns:a="http://schemas.openxmlformats.org/drawingml/2006/main">
               <a:ext uri="{FF2B5EF4-FFF2-40B4-BE49-F238E27FC236}">
-                <a16:creationId xmlns:a16="http://schemas.microsoft.com/office/drawing/2014/main" id="{0CAF7DB9-2A16-4569-A522-8EA0AE6F3655}"/>
+                <a16:creationId xmlns:a16="http://schemas.microsoft.com/office/drawing/2014/main" id="{A471975C-780F-48FB-9A34-8BC4362D45C4}"/>
               </a:ext>
             </a:extLst>
           </p:cNvPr>
@@ -4382,7 +4382,7 @@
           <p:cNvPr id="2" name="">
             <a:extLst xmlns:a="http://schemas.openxmlformats.org/drawingml/2006/main">
               <a:ext uri="{FF2B5EF4-FFF2-40B4-BE49-F238E27FC236}">
-                <a16:creationId xmlns:a16="http://schemas.microsoft.com/office/drawing/2014/main" id="{157A8D42-F996-49C5-BA91-F0EA47C08FF6}"/>
+                <a16:creationId xmlns:a16="http://schemas.microsoft.com/office/drawing/2014/main" id="{45022A85-4F21-4AE1-B4C0-5CC09EA31EF2}"/>
               </a:ext>
             </a:extLst>
           </p:cNvPr>
@@ -4439,7 +4439,7 @@
           <p:cNvPr id="3" name="">
             <a:extLst xmlns:a="http://schemas.openxmlformats.org/drawingml/2006/main">
               <a:ext uri="{FF2B5EF4-FFF2-40B4-BE49-F238E27FC236}">
-                <a16:creationId xmlns:a16="http://schemas.microsoft.com/office/drawing/2014/main" id="{6FC1DBD7-C92E-4131-AE97-ABEF2261817B}"/>
+                <a16:creationId xmlns:a16="http://schemas.microsoft.com/office/drawing/2014/main" id="{520FB7F5-E681-4A83-867C-22F97EEEEA39}"/>
               </a:ext>
             </a:extLst>
           </p:cNvPr>
@@ -4471,7 +4471,7 @@
           <p:cNvPr id="4" name="">
             <a:extLst xmlns:a="http://schemas.openxmlformats.org/drawingml/2006/main">
               <a:ext uri="{FF2B5EF4-FFF2-40B4-BE49-F238E27FC236}">
-                <a16:creationId xmlns:a16="http://schemas.microsoft.com/office/drawing/2014/main" id="{AEBD225C-E0F4-491B-81CA-A7F83814CE81}"/>
+                <a16:creationId xmlns:a16="http://schemas.microsoft.com/office/drawing/2014/main" id="{385B15ED-0C4F-4578-A94A-854524920439}"/>
               </a:ext>
             </a:extLst>
           </p:cNvPr>
@@ -4528,7 +4528,7 @@
           <p:cNvPr id="5" name="">
             <a:extLst xmlns:a="http://schemas.openxmlformats.org/drawingml/2006/main">
               <a:ext uri="{FF2B5EF4-FFF2-40B4-BE49-F238E27FC236}">
-                <a16:creationId xmlns:a16="http://schemas.microsoft.com/office/drawing/2014/main" id="{44111F37-E07E-4168-8E08-3302BAF44A88}"/>
+                <a16:creationId xmlns:a16="http://schemas.microsoft.com/office/drawing/2014/main" id="{D5A80893-DA39-4E9C-8E6F-BE53F8186D5C}"/>
               </a:ext>
             </a:extLst>
           </p:cNvPr>
@@ -4585,7 +4585,7 @@
           <p:cNvPr id="6" name="">
             <a:extLst xmlns:a="http://schemas.openxmlformats.org/drawingml/2006/main">
               <a:ext uri="{FF2B5EF4-FFF2-40B4-BE49-F238E27FC236}">
-                <a16:creationId xmlns:a16="http://schemas.microsoft.com/office/drawing/2014/main" id="{6413663E-423A-4C23-A847-CCA1BB809894}"/>
+                <a16:creationId xmlns:a16="http://schemas.microsoft.com/office/drawing/2014/main" id="{790879DC-6C14-4E59-A70E-0FEFADC15D46}"/>
               </a:ext>
             </a:extLst>
           </p:cNvPr>
@@ -4642,7 +4642,7 @@
           <p:cNvPr id="7" name="">
             <a:extLst xmlns:a="http://schemas.openxmlformats.org/drawingml/2006/main">
               <a:ext uri="{FF2B5EF4-FFF2-40B4-BE49-F238E27FC236}">
-                <a16:creationId xmlns:a16="http://schemas.microsoft.com/office/drawing/2014/main" id="{721513CE-C811-4F8B-B101-783885AC8FBA}"/>
+                <a16:creationId xmlns:a16="http://schemas.microsoft.com/office/drawing/2014/main" id="{62C81BCE-31C6-4452-9D02-F6FDA5DE22A1}"/>
               </a:ext>
             </a:extLst>
           </p:cNvPr>
@@ -4674,7 +4674,7 @@
           <p:cNvPr id="8" name="">
             <a:extLst xmlns:a="http://schemas.openxmlformats.org/drawingml/2006/main">
               <a:ext uri="{FF2B5EF4-FFF2-40B4-BE49-F238E27FC236}">
-                <a16:creationId xmlns:a16="http://schemas.microsoft.com/office/drawing/2014/main" id="{408548EC-9FED-4D12-9B64-49C1EA733A01}"/>
+                <a16:creationId xmlns:a16="http://schemas.microsoft.com/office/drawing/2014/main" id="{583850D9-2C90-4E33-ABE9-2EFFE1EC3074}"/>
               </a:ext>
             </a:extLst>
           </p:cNvPr>
@@ -4731,7 +4731,7 @@
           <p:cNvPr id="9" name="">
             <a:extLst xmlns:a="http://schemas.openxmlformats.org/drawingml/2006/main">
               <a:ext uri="{FF2B5EF4-FFF2-40B4-BE49-F238E27FC236}">
-                <a16:creationId xmlns:a16="http://schemas.microsoft.com/office/drawing/2014/main" id="{23DEAF6B-D58D-464D-B1B3-74BC98C082E4}"/>
+                <a16:creationId xmlns:a16="http://schemas.microsoft.com/office/drawing/2014/main" id="{8547C612-9CEF-4A2E-A153-EA435CD5CBD2}"/>
               </a:ext>
             </a:extLst>
           </p:cNvPr>
@@ -4788,7 +4788,7 @@
           <p:cNvPr id="10" name="">
             <a:extLst xmlns:a="http://schemas.openxmlformats.org/drawingml/2006/main">
               <a:ext uri="{FF2B5EF4-FFF2-40B4-BE49-F238E27FC236}">
-                <a16:creationId xmlns:a16="http://schemas.microsoft.com/office/drawing/2014/main" id="{F28E0518-88E3-499A-8894-2BF52159D322}"/>
+                <a16:creationId xmlns:a16="http://schemas.microsoft.com/office/drawing/2014/main" id="{93768F3D-3EB0-47E0-925F-BA228FEFE764}"/>
               </a:ext>
             </a:extLst>
           </p:cNvPr>
@@ -4822,7 +4822,7 @@
           <p:cNvPr id="11" name="">
             <a:extLst xmlns:a="http://schemas.openxmlformats.org/drawingml/2006/main">
               <a:ext uri="{FF2B5EF4-FFF2-40B4-BE49-F238E27FC236}">
-                <a16:creationId xmlns:a16="http://schemas.microsoft.com/office/drawing/2014/main" id="{75C885AB-596F-4BD3-BA04-96A4CCD43FF9}"/>
+                <a16:creationId xmlns:a16="http://schemas.microsoft.com/office/drawing/2014/main" id="{F2EF60F7-4B24-4242-ACFA-9F5735868C17}"/>
               </a:ext>
             </a:extLst>
           </p:cNvPr>
@@ -4854,7 +4854,7 @@
           <p:cNvPr id="12" name="">
             <a:extLst xmlns:a="http://schemas.openxmlformats.org/drawingml/2006/main">
               <a:ext uri="{FF2B5EF4-FFF2-40B4-BE49-F238E27FC236}">
-                <a16:creationId xmlns:a16="http://schemas.microsoft.com/office/drawing/2014/main" id="{7A452044-B976-400E-B651-9178E98D6974}"/>
+                <a16:creationId xmlns:a16="http://schemas.microsoft.com/office/drawing/2014/main" id="{379DC320-04EB-4D18-AD8D-1B0E680CF040}"/>
               </a:ext>
             </a:extLst>
           </p:cNvPr>
@@ -4911,7 +4911,7 @@
           <p:cNvPr id="13" name="">
             <a:extLst xmlns:a="http://schemas.openxmlformats.org/drawingml/2006/main">
               <a:ext uri="{FF2B5EF4-FFF2-40B4-BE49-F238E27FC236}">
-                <a16:creationId xmlns:a16="http://schemas.microsoft.com/office/drawing/2014/main" id="{33FDB823-401D-4C14-BF1B-761702688D27}"/>
+                <a16:creationId xmlns:a16="http://schemas.microsoft.com/office/drawing/2014/main" id="{BCF91046-C883-46AD-8582-AD6C7E811501}"/>
               </a:ext>
             </a:extLst>
           </p:cNvPr>
@@ -4968,7 +4968,7 @@
           <p:cNvPr id="14" name="">
             <a:extLst xmlns:a="http://schemas.openxmlformats.org/drawingml/2006/main">
               <a:ext uri="{FF2B5EF4-FFF2-40B4-BE49-F238E27FC236}">
-                <a16:creationId xmlns:a16="http://schemas.microsoft.com/office/drawing/2014/main" id="{7BA87E54-3B4E-47BC-B6B7-B2C2985A78C8}"/>
+                <a16:creationId xmlns:a16="http://schemas.microsoft.com/office/drawing/2014/main" id="{FE348C7D-657A-426E-B737-471020473175}"/>
               </a:ext>
             </a:extLst>
           </p:cNvPr>
@@ -5002,7 +5002,7 @@
           <p:cNvPr id="15" name="">
             <a:extLst xmlns:a="http://schemas.openxmlformats.org/drawingml/2006/main">
               <a:ext uri="{FF2B5EF4-FFF2-40B4-BE49-F238E27FC236}">
-                <a16:creationId xmlns:a16="http://schemas.microsoft.com/office/drawing/2014/main" id="{AD540948-D253-4D76-AE76-1259C40B166A}"/>
+                <a16:creationId xmlns:a16="http://schemas.microsoft.com/office/drawing/2014/main" id="{1156D42F-883A-465B-B366-BC93ACED32C9}"/>
               </a:ext>
             </a:extLst>
           </p:cNvPr>
@@ -5034,7 +5034,7 @@
           <p:cNvPr id="16" name="">
             <a:extLst xmlns:a="http://schemas.openxmlformats.org/drawingml/2006/main">
               <a:ext uri="{FF2B5EF4-FFF2-40B4-BE49-F238E27FC236}">
-                <a16:creationId xmlns:a16="http://schemas.microsoft.com/office/drawing/2014/main" id="{443DFD86-E80B-412B-82D6-C35D72285DAE}"/>
+                <a16:creationId xmlns:a16="http://schemas.microsoft.com/office/drawing/2014/main" id="{401DD9E4-9FE5-4EF1-9976-3468DAC81818}"/>
               </a:ext>
             </a:extLst>
           </p:cNvPr>
@@ -5091,7 +5091,7 @@
           <p:cNvPr id="17" name="">
             <a:extLst xmlns:a="http://schemas.openxmlformats.org/drawingml/2006/main">
               <a:ext uri="{FF2B5EF4-FFF2-40B4-BE49-F238E27FC236}">
-                <a16:creationId xmlns:a16="http://schemas.microsoft.com/office/drawing/2014/main" id="{0A508D7E-04E5-4F5D-BB74-826FFE7204B3}"/>
+                <a16:creationId xmlns:a16="http://schemas.microsoft.com/office/drawing/2014/main" id="{D8A0B7F1-F81C-441C-9199-1C01CA31A570}"/>
               </a:ext>
             </a:extLst>
           </p:cNvPr>
@@ -5148,7 +5148,7 @@
           <p:cNvPr id="18" name="">
             <a:extLst xmlns:a="http://schemas.openxmlformats.org/drawingml/2006/main">
               <a:ext uri="{FF2B5EF4-FFF2-40B4-BE49-F238E27FC236}">
-                <a16:creationId xmlns:a16="http://schemas.microsoft.com/office/drawing/2014/main" id="{DB7CCA29-11AB-4C9B-8302-13B094F01157}"/>
+                <a16:creationId xmlns:a16="http://schemas.microsoft.com/office/drawing/2014/main" id="{AA8EB812-9CC3-4980-8A86-E47F9CC89CAE}"/>
               </a:ext>
             </a:extLst>
           </p:cNvPr>
@@ -5182,7 +5182,7 @@
           <p:cNvPr id="19" name="">
             <a:extLst xmlns:a="http://schemas.openxmlformats.org/drawingml/2006/main">
               <a:ext uri="{FF2B5EF4-FFF2-40B4-BE49-F238E27FC236}">
-                <a16:creationId xmlns:a16="http://schemas.microsoft.com/office/drawing/2014/main" id="{F3652410-6918-46C2-AF50-EEBD3ADF5667}"/>
+                <a16:creationId xmlns:a16="http://schemas.microsoft.com/office/drawing/2014/main" id="{091215CB-757F-4ED9-A289-79D83007C363}"/>
               </a:ext>
             </a:extLst>
           </p:cNvPr>
@@ -5214,7 +5214,7 @@
           <p:cNvPr id="20" name="">
             <a:extLst xmlns:a="http://schemas.openxmlformats.org/drawingml/2006/main">
               <a:ext uri="{FF2B5EF4-FFF2-40B4-BE49-F238E27FC236}">
-                <a16:creationId xmlns:a16="http://schemas.microsoft.com/office/drawing/2014/main" id="{AC169C8A-E386-4139-8805-154E528ADA22}"/>
+                <a16:creationId xmlns:a16="http://schemas.microsoft.com/office/drawing/2014/main" id="{714875E5-4816-4FEC-AF00-DE552149C1CF}"/>
               </a:ext>
             </a:extLst>
           </p:cNvPr>
@@ -5271,7 +5271,7 @@
           <p:cNvPr id="21" name="">
             <a:extLst xmlns:a="http://schemas.openxmlformats.org/drawingml/2006/main">
               <a:ext uri="{FF2B5EF4-FFF2-40B4-BE49-F238E27FC236}">
-                <a16:creationId xmlns:a16="http://schemas.microsoft.com/office/drawing/2014/main" id="{170477D9-6DAF-4AD2-BFE6-47E99E913475}"/>
+                <a16:creationId xmlns:a16="http://schemas.microsoft.com/office/drawing/2014/main" id="{B8AC755E-C8A2-4EE1-A2FF-B5F302D79A8C}"/>
               </a:ext>
             </a:extLst>
           </p:cNvPr>
@@ -5328,7 +5328,7 @@
           <p:cNvPr id="22" name="">
             <a:extLst xmlns:a="http://schemas.openxmlformats.org/drawingml/2006/main">
               <a:ext uri="{FF2B5EF4-FFF2-40B4-BE49-F238E27FC236}">
-                <a16:creationId xmlns:a16="http://schemas.microsoft.com/office/drawing/2014/main" id="{8F995E3A-E357-4E1F-9D51-237B97B7EA65}"/>
+                <a16:creationId xmlns:a16="http://schemas.microsoft.com/office/drawing/2014/main" id="{323AE5A7-7DA7-4228-9B23-701CCD1C7239}"/>
               </a:ext>
             </a:extLst>
           </p:cNvPr>
@@ -5383,7 +5383,7 @@
     </p:spTree>
     <p:extLst>
       <p:ext uri="{BB962C8B-B14F-4D97-AF65-F5344CB8AC3E}">
-        <p14:creationId xmlns:p14="http://schemas.microsoft.com/office/powerpoint/2010/main" val="253121227"/>
+        <p14:creationId xmlns:p14="http://schemas.microsoft.com/office/powerpoint/2010/main" val="1203405434"/>
       </p:ext>
     </p:extLst>
   </p:cSld>
@@ -5584,7 +5584,7 @@
           <p:cNvPr id="23" name="">
             <a:extLst xmlns:a="http://schemas.openxmlformats.org/drawingml/2006/main">
               <a:ext uri="{FF2B5EF4-FFF2-40B4-BE49-F238E27FC236}">
-                <a16:creationId xmlns:a16="http://schemas.microsoft.com/office/drawing/2014/main" id="{97524100-AFB2-4E59-A50E-9551AC298D32}"/>
+                <a16:creationId xmlns:a16="http://schemas.microsoft.com/office/drawing/2014/main" id="{7434CE79-CDF7-4AA2-92CF-3649BF446483}"/>
               </a:ext>
             </a:extLst>
           </p:cNvPr>
@@ -5616,7 +5616,7 @@
           <p:cNvPr id="2" name="">
             <a:extLst xmlns:a="http://schemas.openxmlformats.org/drawingml/2006/main">
               <a:ext uri="{FF2B5EF4-FFF2-40B4-BE49-F238E27FC236}">
-                <a16:creationId xmlns:a16="http://schemas.microsoft.com/office/drawing/2014/main" id="{3CA95E85-949B-472E-A68A-5CD80DD02E56}"/>
+                <a16:creationId xmlns:a16="http://schemas.microsoft.com/office/drawing/2014/main" id="{2C68E46F-6C76-4644-B2AA-2A8315D71224}"/>
               </a:ext>
             </a:extLst>
           </p:cNvPr>
@@ -5673,7 +5673,7 @@
           <p:cNvPr id="3" name="">
             <a:extLst xmlns:a="http://schemas.openxmlformats.org/drawingml/2006/main">
               <a:ext uri="{FF2B5EF4-FFF2-40B4-BE49-F238E27FC236}">
-                <a16:creationId xmlns:a16="http://schemas.microsoft.com/office/drawing/2014/main" id="{EFE57FE5-3A25-42FC-8F2A-EF2040D301D2}"/>
+                <a16:creationId xmlns:a16="http://schemas.microsoft.com/office/drawing/2014/main" id="{E8D2C57D-C16D-469A-921B-F5417F2A9EC4}"/>
               </a:ext>
             </a:extLst>
           </p:cNvPr>
@@ -5705,7 +5705,7 @@
           <p:cNvPr id="4" name="">
             <a:extLst xmlns:a="http://schemas.openxmlformats.org/drawingml/2006/main">
               <a:ext uri="{FF2B5EF4-FFF2-40B4-BE49-F238E27FC236}">
-                <a16:creationId xmlns:a16="http://schemas.microsoft.com/office/drawing/2014/main" id="{247D4954-5AEA-478C-A8B7-58A1F7A7333A}"/>
+                <a16:creationId xmlns:a16="http://schemas.microsoft.com/office/drawing/2014/main" id="{5F74A876-6DF4-4AB0-9384-1EB7F0A2455F}"/>
               </a:ext>
             </a:extLst>
           </p:cNvPr>
@@ -5762,7 +5762,7 @@
           <p:cNvPr id="5" name="">
             <a:extLst xmlns:a="http://schemas.openxmlformats.org/drawingml/2006/main">
               <a:ext uri="{FF2B5EF4-FFF2-40B4-BE49-F238E27FC236}">
-                <a16:creationId xmlns:a16="http://schemas.microsoft.com/office/drawing/2014/main" id="{421B30F0-F9B0-4FC1-98B5-A76F333F06C9}"/>
+                <a16:creationId xmlns:a16="http://schemas.microsoft.com/office/drawing/2014/main" id="{4F2CB4EC-65F7-4C2E-9032-355EEBA88C20}"/>
               </a:ext>
             </a:extLst>
           </p:cNvPr>
@@ -5819,7 +5819,7 @@
           <p:cNvPr id="6" name="">
             <a:extLst xmlns:a="http://schemas.openxmlformats.org/drawingml/2006/main">
               <a:ext uri="{FF2B5EF4-FFF2-40B4-BE49-F238E27FC236}">
-                <a16:creationId xmlns:a16="http://schemas.microsoft.com/office/drawing/2014/main" id="{C2480962-DC21-408C-A11B-C868A92AA18C}"/>
+                <a16:creationId xmlns:a16="http://schemas.microsoft.com/office/drawing/2014/main" id="{0879BF4D-3638-4777-B729-88A648032830}"/>
               </a:ext>
             </a:extLst>
           </p:cNvPr>
@@ -5876,7 +5876,7 @@
           <p:cNvPr id="7" name="">
             <a:extLst xmlns:a="http://schemas.openxmlformats.org/drawingml/2006/main">
               <a:ext uri="{FF2B5EF4-FFF2-40B4-BE49-F238E27FC236}">
-                <a16:creationId xmlns:a16="http://schemas.microsoft.com/office/drawing/2014/main" id="{A691B9E9-0179-4BCA-9690-091D97E15F6F}"/>
+                <a16:creationId xmlns:a16="http://schemas.microsoft.com/office/drawing/2014/main" id="{B799B968-AA34-41AD-B5CF-7F218DE12298}"/>
               </a:ext>
             </a:extLst>
           </p:cNvPr>
@@ -5908,7 +5908,7 @@
           <p:cNvPr id="8" name="">
             <a:extLst xmlns:a="http://schemas.openxmlformats.org/drawingml/2006/main">
               <a:ext uri="{FF2B5EF4-FFF2-40B4-BE49-F238E27FC236}">
-                <a16:creationId xmlns:a16="http://schemas.microsoft.com/office/drawing/2014/main" id="{5EA0297D-E26C-4097-842B-FC57101B71B9}"/>
+                <a16:creationId xmlns:a16="http://schemas.microsoft.com/office/drawing/2014/main" id="{043DD2BB-4E29-4CE8-BEC0-6B1686EA567A}"/>
               </a:ext>
             </a:extLst>
           </p:cNvPr>
@@ -5965,7 +5965,7 @@
           <p:cNvPr id="9" name="">
             <a:extLst xmlns:a="http://schemas.openxmlformats.org/drawingml/2006/main">
               <a:ext uri="{FF2B5EF4-FFF2-40B4-BE49-F238E27FC236}">
-                <a16:creationId xmlns:a16="http://schemas.microsoft.com/office/drawing/2014/main" id="{8653A805-2415-4367-AAA6-6995308B303F}"/>
+                <a16:creationId xmlns:a16="http://schemas.microsoft.com/office/drawing/2014/main" id="{52040547-EDF5-4705-A793-F1D7611D2871}"/>
               </a:ext>
             </a:extLst>
           </p:cNvPr>
@@ -6022,7 +6022,7 @@
           <p:cNvPr id="10" name="">
             <a:extLst xmlns:a="http://schemas.openxmlformats.org/drawingml/2006/main">
               <a:ext uri="{FF2B5EF4-FFF2-40B4-BE49-F238E27FC236}">
-                <a16:creationId xmlns:a16="http://schemas.microsoft.com/office/drawing/2014/main" id="{684CF3EF-EEDA-4876-B9C1-330757A1E51C}"/>
+                <a16:creationId xmlns:a16="http://schemas.microsoft.com/office/drawing/2014/main" id="{A90DE74F-6B64-423F-B0F8-5C201A75AE18}"/>
               </a:ext>
             </a:extLst>
           </p:cNvPr>
@@ -6056,7 +6056,7 @@
           <p:cNvPr id="11" name="">
             <a:extLst xmlns:a="http://schemas.openxmlformats.org/drawingml/2006/main">
               <a:ext uri="{FF2B5EF4-FFF2-40B4-BE49-F238E27FC236}">
-                <a16:creationId xmlns:a16="http://schemas.microsoft.com/office/drawing/2014/main" id="{35BD20A6-832E-4D68-8440-429ADE12B082}"/>
+                <a16:creationId xmlns:a16="http://schemas.microsoft.com/office/drawing/2014/main" id="{4B2CD7D7-0222-4033-8BCE-B17EA868A1BA}"/>
               </a:ext>
             </a:extLst>
           </p:cNvPr>
@@ -6088,7 +6088,7 @@
           <p:cNvPr id="12" name="">
             <a:extLst xmlns:a="http://schemas.openxmlformats.org/drawingml/2006/main">
               <a:ext uri="{FF2B5EF4-FFF2-40B4-BE49-F238E27FC236}">
-                <a16:creationId xmlns:a16="http://schemas.microsoft.com/office/drawing/2014/main" id="{4A0A7E11-AD41-47AB-93C7-79E8717B9558}"/>
+                <a16:creationId xmlns:a16="http://schemas.microsoft.com/office/drawing/2014/main" id="{EC3A69AB-072A-4373-9C5A-E31B2E9D0A3B}"/>
               </a:ext>
             </a:extLst>
           </p:cNvPr>
@@ -6145,7 +6145,7 @@
           <p:cNvPr id="13" name="">
             <a:extLst xmlns:a="http://schemas.openxmlformats.org/drawingml/2006/main">
               <a:ext uri="{FF2B5EF4-FFF2-40B4-BE49-F238E27FC236}">
-                <a16:creationId xmlns:a16="http://schemas.microsoft.com/office/drawing/2014/main" id="{A2D5B19D-54B1-4790-8905-AEF4E306EB3E}"/>
+                <a16:creationId xmlns:a16="http://schemas.microsoft.com/office/drawing/2014/main" id="{189BA08E-1959-4AD0-A667-994CAB0F3706}"/>
               </a:ext>
             </a:extLst>
           </p:cNvPr>
@@ -6202,7 +6202,7 @@
           <p:cNvPr id="14" name="">
             <a:extLst xmlns:a="http://schemas.openxmlformats.org/drawingml/2006/main">
               <a:ext uri="{FF2B5EF4-FFF2-40B4-BE49-F238E27FC236}">
-                <a16:creationId xmlns:a16="http://schemas.microsoft.com/office/drawing/2014/main" id="{AE192500-9078-43F7-9E5E-BC7024A774B5}"/>
+                <a16:creationId xmlns:a16="http://schemas.microsoft.com/office/drawing/2014/main" id="{BA6AE833-46E0-49C9-8097-3B91B5B84368}"/>
               </a:ext>
             </a:extLst>
           </p:cNvPr>
@@ -6236,7 +6236,7 @@
           <p:cNvPr id="15" name="">
             <a:extLst xmlns:a="http://schemas.openxmlformats.org/drawingml/2006/main">
               <a:ext uri="{FF2B5EF4-FFF2-40B4-BE49-F238E27FC236}">
-                <a16:creationId xmlns:a16="http://schemas.microsoft.com/office/drawing/2014/main" id="{CB3A17D9-BC7D-442A-A331-1A96D669DCC8}"/>
+                <a16:creationId xmlns:a16="http://schemas.microsoft.com/office/drawing/2014/main" id="{15B206A8-660F-4949-A5C8-604A027016A2}"/>
               </a:ext>
             </a:extLst>
           </p:cNvPr>
@@ -6268,7 +6268,7 @@
           <p:cNvPr id="16" name="">
             <a:extLst xmlns:a="http://schemas.openxmlformats.org/drawingml/2006/main">
               <a:ext uri="{FF2B5EF4-FFF2-40B4-BE49-F238E27FC236}">
-                <a16:creationId xmlns:a16="http://schemas.microsoft.com/office/drawing/2014/main" id="{BB5B60E6-297E-44A4-A642-C2AAC16A7A4F}"/>
+                <a16:creationId xmlns:a16="http://schemas.microsoft.com/office/drawing/2014/main" id="{1034AD9D-CF22-451F-AC8D-402671F60370}"/>
               </a:ext>
             </a:extLst>
           </p:cNvPr>
@@ -6325,7 +6325,7 @@
           <p:cNvPr id="17" name="">
             <a:extLst xmlns:a="http://schemas.openxmlformats.org/drawingml/2006/main">
               <a:ext uri="{FF2B5EF4-FFF2-40B4-BE49-F238E27FC236}">
-                <a16:creationId xmlns:a16="http://schemas.microsoft.com/office/drawing/2014/main" id="{1B3AC797-0DD4-4450-8C9C-D8792322BB83}"/>
+                <a16:creationId xmlns:a16="http://schemas.microsoft.com/office/drawing/2014/main" id="{42DEB394-0683-45DE-AEFA-0EC1D077CCFD}"/>
               </a:ext>
             </a:extLst>
           </p:cNvPr>
@@ -6382,7 +6382,7 @@
           <p:cNvPr id="18" name="">
             <a:extLst xmlns:a="http://schemas.openxmlformats.org/drawingml/2006/main">
               <a:ext uri="{FF2B5EF4-FFF2-40B4-BE49-F238E27FC236}">
-                <a16:creationId xmlns:a16="http://schemas.microsoft.com/office/drawing/2014/main" id="{D2010C4D-61E4-4E14-B49F-3E28301DA57E}"/>
+                <a16:creationId xmlns:a16="http://schemas.microsoft.com/office/drawing/2014/main" id="{271B41A0-8C3D-4446-8648-FF62CD0BCA16}"/>
               </a:ext>
             </a:extLst>
           </p:cNvPr>
@@ -6416,7 +6416,7 @@
           <p:cNvPr id="19" name="">
             <a:extLst xmlns:a="http://schemas.openxmlformats.org/drawingml/2006/main">
               <a:ext uri="{FF2B5EF4-FFF2-40B4-BE49-F238E27FC236}">
-                <a16:creationId xmlns:a16="http://schemas.microsoft.com/office/drawing/2014/main" id="{E1E9C494-7E03-4BD9-AD7D-6B19A9C8C720}"/>
+                <a16:creationId xmlns:a16="http://schemas.microsoft.com/office/drawing/2014/main" id="{BF66AD51-9D2A-45E0-AAF3-EF9401930A99}"/>
               </a:ext>
             </a:extLst>
           </p:cNvPr>
@@ -6448,7 +6448,7 @@
           <p:cNvPr id="20" name="">
             <a:extLst xmlns:a="http://schemas.openxmlformats.org/drawingml/2006/main">
               <a:ext uri="{FF2B5EF4-FFF2-40B4-BE49-F238E27FC236}">
-                <a16:creationId xmlns:a16="http://schemas.microsoft.com/office/drawing/2014/main" id="{F304E11C-7C1C-41F7-AA05-3B340C3BA61E}"/>
+                <a16:creationId xmlns:a16="http://schemas.microsoft.com/office/drawing/2014/main" id="{56932907-2934-4178-8B9F-B46D09C0FD7B}"/>
               </a:ext>
             </a:extLst>
           </p:cNvPr>
@@ -6505,7 +6505,7 @@
           <p:cNvPr id="21" name="">
             <a:extLst xmlns:a="http://schemas.openxmlformats.org/drawingml/2006/main">
               <a:ext uri="{FF2B5EF4-FFF2-40B4-BE49-F238E27FC236}">
-                <a16:creationId xmlns:a16="http://schemas.microsoft.com/office/drawing/2014/main" id="{080D4C25-7173-40D9-B2CE-EB1B9DFA84AA}"/>
+                <a16:creationId xmlns:a16="http://schemas.microsoft.com/office/drawing/2014/main" id="{0A589B11-AEEF-49D8-A547-6075DFD4BC41}"/>
               </a:ext>
             </a:extLst>
           </p:cNvPr>
@@ -6562,7 +6562,7 @@
           <p:cNvPr id="22" name="">
             <a:extLst xmlns:a="http://schemas.openxmlformats.org/drawingml/2006/main">
               <a:ext uri="{FF2B5EF4-FFF2-40B4-BE49-F238E27FC236}">
-                <a16:creationId xmlns:a16="http://schemas.microsoft.com/office/drawing/2014/main" id="{3CF92DB1-6538-4017-8E56-0A8419775138}"/>
+                <a16:creationId xmlns:a16="http://schemas.microsoft.com/office/drawing/2014/main" id="{B947FB29-8461-4AAD-AE4C-A5450768E3B8}"/>
               </a:ext>
             </a:extLst>
           </p:cNvPr>
@@ -6617,7 +6617,7 @@
     </p:spTree>
     <p:extLst>
       <p:ext uri="{BB962C8B-B14F-4D97-AF65-F5344CB8AC3E}">
-        <p14:creationId xmlns:p14="http://schemas.microsoft.com/office/powerpoint/2010/main" val="1552649523"/>
+        <p14:creationId xmlns:p14="http://schemas.microsoft.com/office/powerpoint/2010/main" val="813581509"/>
       </p:ext>
     </p:extLst>
   </p:cSld>
@@ -6818,7 +6818,7 @@
           <p:cNvPr id="16" name="">
             <a:extLst xmlns:a="http://schemas.openxmlformats.org/drawingml/2006/main">
               <a:ext uri="{FF2B5EF4-FFF2-40B4-BE49-F238E27FC236}">
-                <a16:creationId xmlns:a16="http://schemas.microsoft.com/office/drawing/2014/main" id="{37C9F3C7-BAC3-44D9-AEE1-D6EF4334CAF9}"/>
+                <a16:creationId xmlns:a16="http://schemas.microsoft.com/office/drawing/2014/main" id="{690EBEC6-2A72-44C4-861E-84C0DD36D182}"/>
               </a:ext>
             </a:extLst>
           </p:cNvPr>
@@ -6850,7 +6850,7 @@
           <p:cNvPr id="2" name="">
             <a:extLst xmlns:a="http://schemas.openxmlformats.org/drawingml/2006/main">
               <a:ext uri="{FF2B5EF4-FFF2-40B4-BE49-F238E27FC236}">
-                <a16:creationId xmlns:a16="http://schemas.microsoft.com/office/drawing/2014/main" id="{6B67D884-1848-4533-9B56-435922F4422C}"/>
+                <a16:creationId xmlns:a16="http://schemas.microsoft.com/office/drawing/2014/main" id="{CD5A3C6F-22D9-4CBA-BEB6-43BD5D281CC4}"/>
               </a:ext>
             </a:extLst>
           </p:cNvPr>
@@ -6907,7 +6907,7 @@
           <p:cNvPr id="3" name="">
             <a:extLst xmlns:a="http://schemas.openxmlformats.org/drawingml/2006/main">
               <a:ext uri="{FF2B5EF4-FFF2-40B4-BE49-F238E27FC236}">
-                <a16:creationId xmlns:a16="http://schemas.microsoft.com/office/drawing/2014/main" id="{2841C3A9-643D-4F4C-83CE-55A6771A9FA0}"/>
+                <a16:creationId xmlns:a16="http://schemas.microsoft.com/office/drawing/2014/main" id="{5DED4C86-677F-41E9-9187-91FE45FC36DF}"/>
               </a:ext>
             </a:extLst>
           </p:cNvPr>
@@ -6939,7 +6939,7 @@
           <p:cNvPr id="4" name="">
             <a:extLst xmlns:a="http://schemas.openxmlformats.org/drawingml/2006/main">
               <a:ext uri="{FF2B5EF4-FFF2-40B4-BE49-F238E27FC236}">
-                <a16:creationId xmlns:a16="http://schemas.microsoft.com/office/drawing/2014/main" id="{C616056F-4BA7-447F-B8A3-761733610FB2}"/>
+                <a16:creationId xmlns:a16="http://schemas.microsoft.com/office/drawing/2014/main" id="{07445EF8-0E76-4B95-9455-C9107497DA9D}"/>
               </a:ext>
             </a:extLst>
           </p:cNvPr>
@@ -6996,7 +6996,7 @@
           <p:cNvPr id="5" name="">
             <a:extLst xmlns:a="http://schemas.openxmlformats.org/drawingml/2006/main">
               <a:ext uri="{FF2B5EF4-FFF2-40B4-BE49-F238E27FC236}">
-                <a16:creationId xmlns:a16="http://schemas.microsoft.com/office/drawing/2014/main" id="{EED052DA-B434-40EC-A7AE-A75E0E1DB647}"/>
+                <a16:creationId xmlns:a16="http://schemas.microsoft.com/office/drawing/2014/main" id="{E2792823-45F7-45C8-A9BF-4DF8AA376B65}"/>
               </a:ext>
             </a:extLst>
           </p:cNvPr>
@@ -7053,7 +7053,7 @@
           <p:cNvPr id="6" name="">
             <a:extLst xmlns:a="http://schemas.openxmlformats.org/drawingml/2006/main">
               <a:ext uri="{FF2B5EF4-FFF2-40B4-BE49-F238E27FC236}">
-                <a16:creationId xmlns:a16="http://schemas.microsoft.com/office/drawing/2014/main" id="{F506CE8B-0388-4484-9DA5-078EB7837129}"/>
+                <a16:creationId xmlns:a16="http://schemas.microsoft.com/office/drawing/2014/main" id="{F7DF7B02-CA86-4CAA-BE28-11A2F92630A7}"/>
               </a:ext>
             </a:extLst>
           </p:cNvPr>
@@ -7110,7 +7110,7 @@
           <p:cNvPr id="7" name="">
             <a:extLst xmlns:a="http://schemas.openxmlformats.org/drawingml/2006/main">
               <a:ext uri="{FF2B5EF4-FFF2-40B4-BE49-F238E27FC236}">
-                <a16:creationId xmlns:a16="http://schemas.microsoft.com/office/drawing/2014/main" id="{31D1EF65-6B40-4178-AE7D-949C0DBAE728}"/>
+                <a16:creationId xmlns:a16="http://schemas.microsoft.com/office/drawing/2014/main" id="{5637EB57-95D7-4A94-9EF4-38D2E5D03066}"/>
               </a:ext>
             </a:extLst>
           </p:cNvPr>
@@ -7142,7 +7142,7 @@
           <p:cNvPr id="8" name="">
             <a:extLst xmlns:a="http://schemas.openxmlformats.org/drawingml/2006/main">
               <a:ext uri="{FF2B5EF4-FFF2-40B4-BE49-F238E27FC236}">
-                <a16:creationId xmlns:a16="http://schemas.microsoft.com/office/drawing/2014/main" id="{19AF3699-7A5D-495F-9169-A287C953E0F7}"/>
+                <a16:creationId xmlns:a16="http://schemas.microsoft.com/office/drawing/2014/main" id="{7134C925-0634-4728-B838-46DF12176B58}"/>
               </a:ext>
             </a:extLst>
           </p:cNvPr>
@@ -7199,7 +7199,7 @@
           <p:cNvPr id="9" name="">
             <a:extLst xmlns:a="http://schemas.openxmlformats.org/drawingml/2006/main">
               <a:ext uri="{FF2B5EF4-FFF2-40B4-BE49-F238E27FC236}">
-                <a16:creationId xmlns:a16="http://schemas.microsoft.com/office/drawing/2014/main" id="{145908E3-834F-4C43-83B6-B778508A3F22}"/>
+                <a16:creationId xmlns:a16="http://schemas.microsoft.com/office/drawing/2014/main" id="{263BE56B-81DE-4500-82B6-7BFD55475634}"/>
               </a:ext>
             </a:extLst>
           </p:cNvPr>
@@ -7256,7 +7256,7 @@
           <p:cNvPr id="10" name="">
             <a:extLst xmlns:a="http://schemas.openxmlformats.org/drawingml/2006/main">
               <a:ext uri="{FF2B5EF4-FFF2-40B4-BE49-F238E27FC236}">
-                <a16:creationId xmlns:a16="http://schemas.microsoft.com/office/drawing/2014/main" id="{BA703146-1FCB-4C09-BEC7-5A5D139EDA77}"/>
+                <a16:creationId xmlns:a16="http://schemas.microsoft.com/office/drawing/2014/main" id="{89F088A6-0F68-456B-A445-C81AFE6C6155}"/>
               </a:ext>
             </a:extLst>
           </p:cNvPr>
@@ -7313,7 +7313,7 @@
           <p:cNvPr id="11" name="">
             <a:extLst xmlns:a="http://schemas.openxmlformats.org/drawingml/2006/main">
               <a:ext uri="{FF2B5EF4-FFF2-40B4-BE49-F238E27FC236}">
-                <a16:creationId xmlns:a16="http://schemas.microsoft.com/office/drawing/2014/main" id="{B6787655-85B1-45C7-B38C-1711B872D63E}"/>
+                <a16:creationId xmlns:a16="http://schemas.microsoft.com/office/drawing/2014/main" id="{373919F8-388F-4D2F-8EEC-5B5D0FF8D801}"/>
               </a:ext>
             </a:extLst>
           </p:cNvPr>
@@ -7345,7 +7345,7 @@
           <p:cNvPr id="12" name="">
             <a:extLst xmlns:a="http://schemas.openxmlformats.org/drawingml/2006/main">
               <a:ext uri="{FF2B5EF4-FFF2-40B4-BE49-F238E27FC236}">
-                <a16:creationId xmlns:a16="http://schemas.microsoft.com/office/drawing/2014/main" id="{FA1B123D-8266-485B-8846-44A515262496}"/>
+                <a16:creationId xmlns:a16="http://schemas.microsoft.com/office/drawing/2014/main" id="{83ED60ED-56D3-4E7A-809F-A00EA55B1AF9}"/>
               </a:ext>
             </a:extLst>
           </p:cNvPr>
@@ -7402,7 +7402,7 @@
           <p:cNvPr id="13" name="">
             <a:extLst xmlns:a="http://schemas.openxmlformats.org/drawingml/2006/main">
               <a:ext uri="{FF2B5EF4-FFF2-40B4-BE49-F238E27FC236}">
-                <a16:creationId xmlns:a16="http://schemas.microsoft.com/office/drawing/2014/main" id="{C90B1108-C217-4CEC-B9F6-823C942D802D}"/>
+                <a16:creationId xmlns:a16="http://schemas.microsoft.com/office/drawing/2014/main" id="{3DF1B770-A0B6-41D7-B12C-6C4427AFE14D}"/>
               </a:ext>
             </a:extLst>
           </p:cNvPr>
@@ -7459,7 +7459,7 @@
           <p:cNvPr id="14" name="">
             <a:extLst xmlns:a="http://schemas.openxmlformats.org/drawingml/2006/main">
               <a:ext uri="{FF2B5EF4-FFF2-40B4-BE49-F238E27FC236}">
-                <a16:creationId xmlns:a16="http://schemas.microsoft.com/office/drawing/2014/main" id="{6EF13F0B-371E-4D3B-B7D4-31D21BBAC172}"/>
+                <a16:creationId xmlns:a16="http://schemas.microsoft.com/office/drawing/2014/main" id="{5C942A61-F66A-4CD1-A581-BAE2C8D00D96}"/>
               </a:ext>
             </a:extLst>
           </p:cNvPr>
@@ -7516,7 +7516,7 @@
           <p:cNvPr id="15" name="">
             <a:extLst xmlns:a="http://schemas.openxmlformats.org/drawingml/2006/main">
               <a:ext uri="{FF2B5EF4-FFF2-40B4-BE49-F238E27FC236}">
-                <a16:creationId xmlns:a16="http://schemas.microsoft.com/office/drawing/2014/main" id="{E40C880D-CD99-4744-B11B-BA587FBDC77D}"/>
+                <a16:creationId xmlns:a16="http://schemas.microsoft.com/office/drawing/2014/main" id="{6EE2F8C2-AF9F-4138-84A4-C6B1D1134267}"/>
               </a:ext>
             </a:extLst>
           </p:cNvPr>
@@ -7571,7 +7571,7 @@
     </p:spTree>
     <p:extLst>
       <p:ext uri="{BB962C8B-B14F-4D97-AF65-F5344CB8AC3E}">
-        <p14:creationId xmlns:p14="http://schemas.microsoft.com/office/powerpoint/2010/main" val="2071734642"/>
+        <p14:creationId xmlns:p14="http://schemas.microsoft.com/office/powerpoint/2010/main" val="965109399"/>
       </p:ext>
     </p:extLst>
   </p:cSld>
@@ -7769,10 +7769,10 @@
       </p:grpSpPr>
       <p:sp>
         <p:nvSpPr>
-          <p:cNvPr id="23" name="">
-            <a:extLst xmlns:a="http://schemas.openxmlformats.org/drawingml/2006/main">
-              <a:ext uri="{FF2B5EF4-FFF2-40B4-BE49-F238E27FC236}">
-                <a16:creationId xmlns:a16="http://schemas.microsoft.com/office/drawing/2014/main" id="{166C5D7B-3AAF-41D5-911D-D63A3FA6A41B}"/>
+          <p:cNvPr id="26" name="">
+            <a:extLst xmlns:a="http://schemas.openxmlformats.org/drawingml/2006/main">
+              <a:ext uri="{FF2B5EF4-FFF2-40B4-BE49-F238E27FC236}">
+                <a16:creationId xmlns:a16="http://schemas.microsoft.com/office/drawing/2014/main" id="{06FB38EF-786A-4EEB-BF90-E6AA15C79CD5}"/>
               </a:ext>
             </a:extLst>
           </p:cNvPr>
@@ -7804,7 +7804,7 @@
           <p:cNvPr id="2" name="">
             <a:extLst xmlns:a="http://schemas.openxmlformats.org/drawingml/2006/main">
               <a:ext uri="{FF2B5EF4-FFF2-40B4-BE49-F238E27FC236}">
-                <a16:creationId xmlns:a16="http://schemas.microsoft.com/office/drawing/2014/main" id="{27EB4466-A241-4A02-BAAB-D8A015BD599E}"/>
+                <a16:creationId xmlns:a16="http://schemas.microsoft.com/office/drawing/2014/main" id="{78ABD297-5942-457B-9AE4-C95D075112C1}"/>
               </a:ext>
             </a:extLst>
           </p:cNvPr>
@@ -7861,7 +7861,7 @@
           <p:cNvPr id="3" name="">
             <a:extLst xmlns:a="http://schemas.openxmlformats.org/drawingml/2006/main">
               <a:ext uri="{FF2B5EF4-FFF2-40B4-BE49-F238E27FC236}">
-                <a16:creationId xmlns:a16="http://schemas.microsoft.com/office/drawing/2014/main" id="{ED5F688A-D10D-4ADB-8F57-A661CD315533}"/>
+                <a16:creationId xmlns:a16="http://schemas.microsoft.com/office/drawing/2014/main" id="{18A9128D-9D8C-4C8B-901C-85FE60F90CBD}"/>
               </a:ext>
             </a:extLst>
           </p:cNvPr>
@@ -7893,7 +7893,7 @@
           <p:cNvPr id="4" name="">
             <a:extLst xmlns:a="http://schemas.openxmlformats.org/drawingml/2006/main">
               <a:ext uri="{FF2B5EF4-FFF2-40B4-BE49-F238E27FC236}">
-                <a16:creationId xmlns:a16="http://schemas.microsoft.com/office/drawing/2014/main" id="{6485B0CC-D0F2-426C-AE86-FD521B05829D}"/>
+                <a16:creationId xmlns:a16="http://schemas.microsoft.com/office/drawing/2014/main" id="{E64D8E1F-B058-4C76-9BBF-A87A9D4677ED}"/>
               </a:ext>
             </a:extLst>
           </p:cNvPr>
@@ -7950,7 +7950,7 @@
           <p:cNvPr id="5" name="">
             <a:extLst xmlns:a="http://schemas.openxmlformats.org/drawingml/2006/main">
               <a:ext uri="{FF2B5EF4-FFF2-40B4-BE49-F238E27FC236}">
-                <a16:creationId xmlns:a16="http://schemas.microsoft.com/office/drawing/2014/main" id="{17419922-A694-40A8-A999-F6124465DFCC}"/>
+                <a16:creationId xmlns:a16="http://schemas.microsoft.com/office/drawing/2014/main" id="{6F7F201B-B720-4052-8445-05C41430C983}"/>
               </a:ext>
             </a:extLst>
           </p:cNvPr>
@@ -8007,7 +8007,7 @@
           <p:cNvPr id="6" name="">
             <a:extLst xmlns:a="http://schemas.openxmlformats.org/drawingml/2006/main">
               <a:ext uri="{FF2B5EF4-FFF2-40B4-BE49-F238E27FC236}">
-                <a16:creationId xmlns:a16="http://schemas.microsoft.com/office/drawing/2014/main" id="{4EEFF886-632D-44D0-90DB-44BB20C759F0}"/>
+                <a16:creationId xmlns:a16="http://schemas.microsoft.com/office/drawing/2014/main" id="{0CA5840D-0721-4BFC-9C16-C25ABACDCEE0}"/>
               </a:ext>
             </a:extLst>
           </p:cNvPr>
@@ -8064,7 +8064,7 @@
           <p:cNvPr id="7" name="">
             <a:extLst xmlns:a="http://schemas.openxmlformats.org/drawingml/2006/main">
               <a:ext uri="{FF2B5EF4-FFF2-40B4-BE49-F238E27FC236}">
-                <a16:creationId xmlns:a16="http://schemas.microsoft.com/office/drawing/2014/main" id="{563368F8-82E5-478E-8200-B66E4965119F}"/>
+                <a16:creationId xmlns:a16="http://schemas.microsoft.com/office/drawing/2014/main" id="{44A08FB4-5A7B-442E-A6AF-92E90D7DE7BA}"/>
               </a:ext>
             </a:extLst>
           </p:cNvPr>
@@ -8096,7 +8096,7 @@
           <p:cNvPr id="8" name="">
             <a:extLst xmlns:a="http://schemas.openxmlformats.org/drawingml/2006/main">
               <a:ext uri="{FF2B5EF4-FFF2-40B4-BE49-F238E27FC236}">
-                <a16:creationId xmlns:a16="http://schemas.microsoft.com/office/drawing/2014/main" id="{E215F280-7B63-4526-BD17-B4121FC74A61}"/>
+                <a16:creationId xmlns:a16="http://schemas.microsoft.com/office/drawing/2014/main" id="{853AC338-9F78-4C1A-A387-C36C54BCD9B4}"/>
               </a:ext>
             </a:extLst>
           </p:cNvPr>
@@ -8153,7 +8153,7 @@
           <p:cNvPr id="9" name="">
             <a:extLst xmlns:a="http://schemas.openxmlformats.org/drawingml/2006/main">
               <a:ext uri="{FF2B5EF4-FFF2-40B4-BE49-F238E27FC236}">
-                <a16:creationId xmlns:a16="http://schemas.microsoft.com/office/drawing/2014/main" id="{E0DF7120-F993-45A2-86AD-6CA24F3970B8}"/>
+                <a16:creationId xmlns:a16="http://schemas.microsoft.com/office/drawing/2014/main" id="{0D98E910-10AF-4872-A67C-5C80EABC0A15}"/>
               </a:ext>
             </a:extLst>
           </p:cNvPr>
@@ -8210,19 +8210,19 @@
           <p:cNvPr id="10" name="">
             <a:extLst xmlns:a="http://schemas.openxmlformats.org/drawingml/2006/main">
               <a:ext uri="{FF2B5EF4-FFF2-40B4-BE49-F238E27FC236}">
-                <a16:creationId xmlns:a16="http://schemas.microsoft.com/office/drawing/2014/main" id="{5D53F992-8784-4019-967C-3D822183D6B7}"/>
-              </a:ext>
-            </a:extLst>
-          </p:cNvPr>
-          <p:cNvSpPr>
-            <a:spLocks xmlns:a="http://schemas.openxmlformats.org/drawingml/2006/main" noGrp="1"/>
-          </p:cNvSpPr>
-          <p:nvPr/>
-        </p:nvSpPr>
-        <p:spPr>
-          <a:xfrm xmlns:a="http://schemas.openxmlformats.org/drawingml/2006/main">
-            <a:off x="914400" y="1257300"/>
-            <a:ext cx="10363200" cy="781050"/>
+                <a16:creationId xmlns:a16="http://schemas.microsoft.com/office/drawing/2014/main" id="{A2C65E9F-B572-42A1-A9F7-610046F38320}"/>
+              </a:ext>
+            </a:extLst>
+          </p:cNvPr>
+          <p:cNvSpPr>
+            <a:spLocks xmlns:a="http://schemas.openxmlformats.org/drawingml/2006/main" noGrp="1"/>
+          </p:cNvSpPr>
+          <p:nvPr/>
+        </p:nvSpPr>
+        <p:spPr>
+          <a:xfrm xmlns:a="http://schemas.openxmlformats.org/drawingml/2006/main">
+            <a:off x="857250" y="1219200"/>
+            <a:ext cx="10477500" cy="742950"/>
           </a:xfrm>
           <a:prstGeom xmlns:a="http://schemas.openxmlformats.org/drawingml/2006/main" prst="rect">
             <a:avLst/>
@@ -8239,7 +8239,7 @@
           <a:lstStyle xmlns:a="http://schemas.openxmlformats.org/drawingml/2006/main"/>
           <a:p xmlns:a="http://schemas.openxmlformats.org/drawingml/2006/main">
             <a:pPr algn="ctr">
-              <a:defRPr sz="2175" b="1">
+              <a:defRPr sz="2100" b="1">
                 <a:solidFill>
                   <a:srgbClr val="17253A"/>
                 </a:solidFill>
@@ -8249,7 +8249,7 @@
               </a:defRPr>
             </a:pPr>
             <a:r>
-              <a:rPr sz="2175" b="1">
+              <a:rPr sz="2100" b="1">
                 <a:solidFill>
                   <a:srgbClr val="17253A"/>
                 </a:solidFill>
@@ -8267,28 +8267,30 @@
           <p:cNvPr id="11" name="">
             <a:extLst xmlns:a="http://schemas.openxmlformats.org/drawingml/2006/main">
               <a:ext uri="{FF2B5EF4-FFF2-40B4-BE49-F238E27FC236}">
-                <a16:creationId xmlns:a16="http://schemas.microsoft.com/office/drawing/2014/main" id="{A03B8E1B-E21E-40E4-9881-7F8D9EA3453F}"/>
-              </a:ext>
-            </a:extLst>
-          </p:cNvPr>
-          <p:cNvSpPr>
-            <a:spLocks xmlns:a="http://schemas.openxmlformats.org/drawingml/2006/main" noGrp="1"/>
-          </p:cNvSpPr>
-          <p:nvPr/>
-        </p:nvSpPr>
-        <p:spPr>
-          <a:xfrm xmlns:a="http://schemas.openxmlformats.org/drawingml/2006/main">
-            <a:off x="1000125" y="2247900"/>
-            <a:ext cx="476250" cy="476250"/>
-          </a:xfrm>
-          <a:prstGeom xmlns:a="http://schemas.openxmlformats.org/drawingml/2006/main" prst="ellipse">
+                <a16:creationId xmlns:a16="http://schemas.microsoft.com/office/drawing/2014/main" id="{32332D9C-8E63-4655-9CFD-7B526795E6E6}"/>
+              </a:ext>
+            </a:extLst>
+          </p:cNvPr>
+          <p:cNvSpPr>
+            <a:spLocks xmlns:a="http://schemas.openxmlformats.org/drawingml/2006/main" noGrp="1"/>
+          </p:cNvSpPr>
+          <p:nvPr/>
+        </p:nvSpPr>
+        <p:spPr>
+          <a:xfrm xmlns:a="http://schemas.openxmlformats.org/drawingml/2006/main">
+            <a:off x="971550" y="2124075"/>
+            <a:ext cx="38100" cy="3524250"/>
+          </a:xfrm>
+          <a:prstGeom xmlns:a="http://schemas.openxmlformats.org/drawingml/2006/main" prst="rect">
             <a:avLst/>
           </a:prstGeom>
           <a:solidFill xmlns:a="http://schemas.openxmlformats.org/drawingml/2006/main">
-            <a:srgbClr val="18324A"/>
+            <a:srgbClr val="2C6E73"/>
           </a:solidFill>
           <a:ln xmlns:a="http://schemas.openxmlformats.org/drawingml/2006/main" w="0">
-            <a:noFill/>
+            <a:solidFill>
+              <a:srgbClr val="2C6E73"/>
+            </a:solidFill>
           </a:ln>
         </p:spPr>
       </p:sp>
@@ -8297,19 +8299,19 @@
           <p:cNvPr id="12" name="">
             <a:extLst xmlns:a="http://schemas.openxmlformats.org/drawingml/2006/main">
               <a:ext uri="{FF2B5EF4-FFF2-40B4-BE49-F238E27FC236}">
-                <a16:creationId xmlns:a16="http://schemas.microsoft.com/office/drawing/2014/main" id="{AB6AE4AD-08CC-498B-9E2F-1BE0EEB151DD}"/>
-              </a:ext>
-            </a:extLst>
-          </p:cNvPr>
-          <p:cNvSpPr>
-            <a:spLocks xmlns:a="http://schemas.openxmlformats.org/drawingml/2006/main" noGrp="1"/>
-          </p:cNvSpPr>
-          <p:nvPr/>
-        </p:nvSpPr>
-        <p:spPr>
-          <a:xfrm xmlns:a="http://schemas.openxmlformats.org/drawingml/2006/main">
-            <a:off x="1000125" y="2276475"/>
-            <a:ext cx="476250" cy="419100"/>
+                <a16:creationId xmlns:a16="http://schemas.microsoft.com/office/drawing/2014/main" id="{C5694FD1-E3EA-4725-9823-B95A951ACF39}"/>
+              </a:ext>
+            </a:extLst>
+          </p:cNvPr>
+          <p:cNvSpPr>
+            <a:spLocks xmlns:a="http://schemas.openxmlformats.org/drawingml/2006/main" noGrp="1"/>
+          </p:cNvSpPr>
+          <p:nvPr/>
+        </p:nvSpPr>
+        <p:spPr>
+          <a:xfrm xmlns:a="http://schemas.openxmlformats.org/drawingml/2006/main">
+            <a:off x="1162050" y="2200275"/>
+            <a:ext cx="400050" cy="400050"/>
           </a:xfrm>
           <a:prstGeom xmlns:a="http://schemas.openxmlformats.org/drawingml/2006/main" prst="rect">
             <a:avLst/>
@@ -8326,9 +8328,9 @@
           <a:lstStyle xmlns:a="http://schemas.openxmlformats.org/drawingml/2006/main"/>
           <a:p xmlns:a="http://schemas.openxmlformats.org/drawingml/2006/main">
             <a:pPr algn="ctr">
-              <a:defRPr sz="1350" b="1">
-                <a:solidFill>
-                  <a:srgbClr val="FFFFFF"/>
+              <a:defRPr sz="1125" b="1">
+                <a:solidFill>
+                  <a:srgbClr val="2C6E73"/>
                 </a:solidFill>
                 <a:latin typeface="Arial"/>
                 <a:ea typeface="Arial"/>
@@ -8336,9 +8338,9 @@
               </a:defRPr>
             </a:pPr>
             <a:r>
-              <a:rPr sz="1350" b="1">
-                <a:solidFill>
-                  <a:srgbClr val="FFFFFF"/>
+              <a:rPr sz="1125" b="1">
+                <a:solidFill>
+                  <a:srgbClr val="2C6E73"/>
                 </a:solidFill>
                 <a:latin typeface="Arial"/>
                 <a:ea typeface="Arial"/>
@@ -8354,19 +8356,19 @@
           <p:cNvPr id="13" name="">
             <a:extLst xmlns:a="http://schemas.openxmlformats.org/drawingml/2006/main">
               <a:ext uri="{FF2B5EF4-FFF2-40B4-BE49-F238E27FC236}">
-                <a16:creationId xmlns:a16="http://schemas.microsoft.com/office/drawing/2014/main" id="{899F898B-1647-421B-B54D-D8572492C282}"/>
-              </a:ext>
-            </a:extLst>
-          </p:cNvPr>
-          <p:cNvSpPr>
-            <a:spLocks xmlns:a="http://schemas.openxmlformats.org/drawingml/2006/main" noGrp="1"/>
-          </p:cNvSpPr>
-          <p:nvPr/>
-        </p:nvSpPr>
-        <p:spPr>
-          <a:xfrm xmlns:a="http://schemas.openxmlformats.org/drawingml/2006/main">
-            <a:off x="1714500" y="2181225"/>
-            <a:ext cx="9429750" cy="609600"/>
+                <a16:creationId xmlns:a16="http://schemas.microsoft.com/office/drawing/2014/main" id="{7C83F3D6-522F-4354-B868-8BCDC58EC36D}"/>
+              </a:ext>
+            </a:extLst>
+          </p:cNvPr>
+          <p:cNvSpPr>
+            <a:spLocks xmlns:a="http://schemas.openxmlformats.org/drawingml/2006/main" noGrp="1"/>
+          </p:cNvSpPr>
+          <p:nvPr/>
+        </p:nvSpPr>
+        <p:spPr>
+          <a:xfrm xmlns:a="http://schemas.openxmlformats.org/drawingml/2006/main">
+            <a:off x="1714500" y="2114550"/>
+            <a:ext cx="9525000" cy="638175"/>
           </a:xfrm>
           <a:prstGeom xmlns:a="http://schemas.openxmlformats.org/drawingml/2006/main" prst="rect">
             <a:avLst/>
@@ -8383,7 +8385,7 @@
           <a:lstStyle xmlns:a="http://schemas.openxmlformats.org/drawingml/2006/main"/>
           <a:p xmlns:a="http://schemas.openxmlformats.org/drawingml/2006/main">
             <a:pPr algn="l">
-              <a:defRPr sz="1500" b="0">
+              <a:defRPr sz="1575" b="0">
                 <a:solidFill>
                   <a:srgbClr val="17253A"/>
                 </a:solidFill>
@@ -8393,7 +8395,7 @@
               </a:defRPr>
             </a:pPr>
             <a:r>
-              <a:rPr sz="1500" b="0">
+              <a:rPr sz="1575" b="0">
                 <a:solidFill>
                   <a:srgbClr val="17253A"/>
                 </a:solidFill>
@@ -8401,7 +8403,7 @@
                 <a:ea typeface="Arial"/>
                 <a:cs typeface="Arial"/>
               </a:rPr>
-              <a:t>Identify the structure: Notice the number structure before choosing a method.</a:t>
+              <a:t>3,998 + 2,507</a:t>
             </a:r>
           </a:p>
         </p:txBody>
@@ -8411,28 +8413,30 @@
           <p:cNvPr id="14" name="">
             <a:extLst xmlns:a="http://schemas.openxmlformats.org/drawingml/2006/main">
               <a:ext uri="{FF2B5EF4-FFF2-40B4-BE49-F238E27FC236}">
-                <a16:creationId xmlns:a16="http://schemas.microsoft.com/office/drawing/2014/main" id="{7F2E8E31-B833-4C4B-8F90-3F6E6E5C70F4}"/>
-              </a:ext>
-            </a:extLst>
-          </p:cNvPr>
-          <p:cNvSpPr>
-            <a:spLocks xmlns:a="http://schemas.openxmlformats.org/drawingml/2006/main" noGrp="1"/>
-          </p:cNvSpPr>
-          <p:nvPr/>
-        </p:nvSpPr>
-        <p:spPr>
-          <a:xfrm xmlns:a="http://schemas.openxmlformats.org/drawingml/2006/main">
-            <a:off x="1000125" y="2990850"/>
-            <a:ext cx="476250" cy="476250"/>
-          </a:xfrm>
-          <a:prstGeom xmlns:a="http://schemas.openxmlformats.org/drawingml/2006/main" prst="ellipse">
+                <a16:creationId xmlns:a16="http://schemas.microsoft.com/office/drawing/2014/main" id="{A8E0A3AC-5E80-4876-9D94-22575D000603}"/>
+              </a:ext>
+            </a:extLst>
+          </p:cNvPr>
+          <p:cNvSpPr>
+            <a:spLocks xmlns:a="http://schemas.openxmlformats.org/drawingml/2006/main" noGrp="1"/>
+          </p:cNvSpPr>
+          <p:nvPr/>
+        </p:nvSpPr>
+        <p:spPr>
+          <a:xfrm xmlns:a="http://schemas.openxmlformats.org/drawingml/2006/main">
+            <a:off x="1714500" y="2771775"/>
+            <a:ext cx="9334500" cy="9525"/>
+          </a:xfrm>
+          <a:prstGeom xmlns:a="http://schemas.openxmlformats.org/drawingml/2006/main" prst="rect">
             <a:avLst/>
           </a:prstGeom>
           <a:solidFill xmlns:a="http://schemas.openxmlformats.org/drawingml/2006/main">
-            <a:srgbClr val="2C6E73"/>
+            <a:srgbClr val="D9E0E6"/>
           </a:solidFill>
           <a:ln xmlns:a="http://schemas.openxmlformats.org/drawingml/2006/main" w="0">
-            <a:noFill/>
+            <a:solidFill>
+              <a:srgbClr val="D9E0E6"/>
+            </a:solidFill>
           </a:ln>
         </p:spPr>
       </p:sp>
@@ -8441,19 +8445,19 @@
           <p:cNvPr id="15" name="">
             <a:extLst xmlns:a="http://schemas.openxmlformats.org/drawingml/2006/main">
               <a:ext uri="{FF2B5EF4-FFF2-40B4-BE49-F238E27FC236}">
-                <a16:creationId xmlns:a16="http://schemas.microsoft.com/office/drawing/2014/main" id="{86C06694-D543-4549-99B1-BA9B5DF3AA8C}"/>
-              </a:ext>
-            </a:extLst>
-          </p:cNvPr>
-          <p:cNvSpPr>
-            <a:spLocks xmlns:a="http://schemas.openxmlformats.org/drawingml/2006/main" noGrp="1"/>
-          </p:cNvSpPr>
-          <p:nvPr/>
-        </p:nvSpPr>
-        <p:spPr>
-          <a:xfrm xmlns:a="http://schemas.openxmlformats.org/drawingml/2006/main">
-            <a:off x="1000125" y="3019425"/>
-            <a:ext cx="476250" cy="419100"/>
+                <a16:creationId xmlns:a16="http://schemas.microsoft.com/office/drawing/2014/main" id="{3A033C3D-21F0-4A01-A0CD-B5585E2B416E}"/>
+              </a:ext>
+            </a:extLst>
+          </p:cNvPr>
+          <p:cNvSpPr>
+            <a:spLocks xmlns:a="http://schemas.openxmlformats.org/drawingml/2006/main" noGrp="1"/>
+          </p:cNvSpPr>
+          <p:nvPr/>
+        </p:nvSpPr>
+        <p:spPr>
+          <a:xfrm xmlns:a="http://schemas.openxmlformats.org/drawingml/2006/main">
+            <a:off x="1162050" y="2905125"/>
+            <a:ext cx="400050" cy="400050"/>
           </a:xfrm>
           <a:prstGeom xmlns:a="http://schemas.openxmlformats.org/drawingml/2006/main" prst="rect">
             <a:avLst/>
@@ -8470,9 +8474,9 @@
           <a:lstStyle xmlns:a="http://schemas.openxmlformats.org/drawingml/2006/main"/>
           <a:p xmlns:a="http://schemas.openxmlformats.org/drawingml/2006/main">
             <a:pPr algn="ctr">
-              <a:defRPr sz="1350" b="1">
-                <a:solidFill>
-                  <a:srgbClr val="FFFFFF"/>
+              <a:defRPr sz="1125" b="1">
+                <a:solidFill>
+                  <a:srgbClr val="2C6E73"/>
                 </a:solidFill>
                 <a:latin typeface="Arial"/>
                 <a:ea typeface="Arial"/>
@@ -8480,9 +8484,9 @@
               </a:defRPr>
             </a:pPr>
             <a:r>
-              <a:rPr sz="1350" b="1">
-                <a:solidFill>
-                  <a:srgbClr val="FFFFFF"/>
+              <a:rPr sz="1125" b="1">
+                <a:solidFill>
+                  <a:srgbClr val="2C6E73"/>
                 </a:solidFill>
                 <a:latin typeface="Arial"/>
                 <a:ea typeface="Arial"/>
@@ -8498,19 +8502,19 @@
           <p:cNvPr id="16" name="">
             <a:extLst xmlns:a="http://schemas.openxmlformats.org/drawingml/2006/main">
               <a:ext uri="{FF2B5EF4-FFF2-40B4-BE49-F238E27FC236}">
-                <a16:creationId xmlns:a16="http://schemas.microsoft.com/office/drawing/2014/main" id="{FF251661-E484-4418-98A3-92B834294897}"/>
-              </a:ext>
-            </a:extLst>
-          </p:cNvPr>
-          <p:cNvSpPr>
-            <a:spLocks xmlns:a="http://schemas.openxmlformats.org/drawingml/2006/main" noGrp="1"/>
-          </p:cNvSpPr>
-          <p:nvPr/>
-        </p:nvSpPr>
-        <p:spPr>
-          <a:xfrm xmlns:a="http://schemas.openxmlformats.org/drawingml/2006/main">
-            <a:off x="1714500" y="2924175"/>
-            <a:ext cx="9429750" cy="609600"/>
+                <a16:creationId xmlns:a16="http://schemas.microsoft.com/office/drawing/2014/main" id="{48E5AECC-9B5A-406B-A82D-992899DE6EE4}"/>
+              </a:ext>
+            </a:extLst>
+          </p:cNvPr>
+          <p:cNvSpPr>
+            <a:spLocks xmlns:a="http://schemas.openxmlformats.org/drawingml/2006/main" noGrp="1"/>
+          </p:cNvSpPr>
+          <p:nvPr/>
+        </p:nvSpPr>
+        <p:spPr>
+          <a:xfrm xmlns:a="http://schemas.openxmlformats.org/drawingml/2006/main">
+            <a:off x="1714500" y="2819400"/>
+            <a:ext cx="9525000" cy="638175"/>
           </a:xfrm>
           <a:prstGeom xmlns:a="http://schemas.openxmlformats.org/drawingml/2006/main" prst="rect">
             <a:avLst/>
@@ -8527,7 +8531,7 @@
           <a:lstStyle xmlns:a="http://schemas.openxmlformats.org/drawingml/2006/main"/>
           <a:p xmlns:a="http://schemas.openxmlformats.org/drawingml/2006/main">
             <a:pPr algn="l">
-              <a:defRPr sz="1500" b="0">
+              <a:defRPr sz="1575" b="0">
                 <a:solidFill>
                   <a:srgbClr val="17253A"/>
                 </a:solidFill>
@@ -8537,7 +8541,7 @@
               </a:defRPr>
             </a:pPr>
             <a:r>
-              <a:rPr sz="1500" b="0">
+              <a:rPr sz="1575" b="0">
                 <a:solidFill>
                   <a:srgbClr val="17253A"/>
                 </a:solidFill>
@@ -8545,7 +8549,7 @@
                 <a:ea typeface="Arial"/>
                 <a:cs typeface="Arial"/>
               </a:rPr>
-              <a:t>Set up the method: Use a known fact, partition or compensation to calculate efficiently.</a:t>
+              <a:t>Compensate 3,998 to 4,000</a:t>
             </a:r>
           </a:p>
         </p:txBody>
@@ -8555,28 +8559,30 @@
           <p:cNvPr id="17" name="">
             <a:extLst xmlns:a="http://schemas.openxmlformats.org/drawingml/2006/main">
               <a:ext uri="{FF2B5EF4-FFF2-40B4-BE49-F238E27FC236}">
-                <a16:creationId xmlns:a16="http://schemas.microsoft.com/office/drawing/2014/main" id="{CB5D4EF9-6323-45B2-B36C-2E4DC0340A5D}"/>
-              </a:ext>
-            </a:extLst>
-          </p:cNvPr>
-          <p:cNvSpPr>
-            <a:spLocks xmlns:a="http://schemas.openxmlformats.org/drawingml/2006/main" noGrp="1"/>
-          </p:cNvSpPr>
-          <p:nvPr/>
-        </p:nvSpPr>
-        <p:spPr>
-          <a:xfrm xmlns:a="http://schemas.openxmlformats.org/drawingml/2006/main">
-            <a:off x="1000125" y="3733800"/>
-            <a:ext cx="476250" cy="476250"/>
-          </a:xfrm>
-          <a:prstGeom xmlns:a="http://schemas.openxmlformats.org/drawingml/2006/main" prst="ellipse">
+                <a16:creationId xmlns:a16="http://schemas.microsoft.com/office/drawing/2014/main" id="{631D8D8C-1BC5-43C4-8B45-404DE145E024}"/>
+              </a:ext>
+            </a:extLst>
+          </p:cNvPr>
+          <p:cNvSpPr>
+            <a:spLocks xmlns:a="http://schemas.openxmlformats.org/drawingml/2006/main" noGrp="1"/>
+          </p:cNvSpPr>
+          <p:nvPr/>
+        </p:nvSpPr>
+        <p:spPr>
+          <a:xfrm xmlns:a="http://schemas.openxmlformats.org/drawingml/2006/main">
+            <a:off x="1714500" y="3476625"/>
+            <a:ext cx="9334500" cy="9525"/>
+          </a:xfrm>
+          <a:prstGeom xmlns:a="http://schemas.openxmlformats.org/drawingml/2006/main" prst="rect">
             <a:avLst/>
           </a:prstGeom>
           <a:solidFill xmlns:a="http://schemas.openxmlformats.org/drawingml/2006/main">
-            <a:srgbClr val="2C6E73"/>
+            <a:srgbClr val="D9E0E6"/>
           </a:solidFill>
           <a:ln xmlns:a="http://schemas.openxmlformats.org/drawingml/2006/main" w="0">
-            <a:noFill/>
+            <a:solidFill>
+              <a:srgbClr val="D9E0E6"/>
+            </a:solidFill>
           </a:ln>
         </p:spPr>
       </p:sp>
@@ -8585,19 +8591,19 @@
           <p:cNvPr id="18" name="">
             <a:extLst xmlns:a="http://schemas.openxmlformats.org/drawingml/2006/main">
               <a:ext uri="{FF2B5EF4-FFF2-40B4-BE49-F238E27FC236}">
-                <a16:creationId xmlns:a16="http://schemas.microsoft.com/office/drawing/2014/main" id="{28E7E413-611D-426D-A438-54D06B137FFC}"/>
-              </a:ext>
-            </a:extLst>
-          </p:cNvPr>
-          <p:cNvSpPr>
-            <a:spLocks xmlns:a="http://schemas.openxmlformats.org/drawingml/2006/main" noGrp="1"/>
-          </p:cNvSpPr>
-          <p:nvPr/>
-        </p:nvSpPr>
-        <p:spPr>
-          <a:xfrm xmlns:a="http://schemas.openxmlformats.org/drawingml/2006/main">
-            <a:off x="1000125" y="3762375"/>
-            <a:ext cx="476250" cy="419100"/>
+                <a16:creationId xmlns:a16="http://schemas.microsoft.com/office/drawing/2014/main" id="{A19EA49B-BF4F-47CD-BE15-5CDF7A6A61FC}"/>
+              </a:ext>
+            </a:extLst>
+          </p:cNvPr>
+          <p:cNvSpPr>
+            <a:spLocks xmlns:a="http://schemas.openxmlformats.org/drawingml/2006/main" noGrp="1"/>
+          </p:cNvSpPr>
+          <p:nvPr/>
+        </p:nvSpPr>
+        <p:spPr>
+          <a:xfrm xmlns:a="http://schemas.openxmlformats.org/drawingml/2006/main">
+            <a:off x="1162050" y="3609975"/>
+            <a:ext cx="400050" cy="400050"/>
           </a:xfrm>
           <a:prstGeom xmlns:a="http://schemas.openxmlformats.org/drawingml/2006/main" prst="rect">
             <a:avLst/>
@@ -8614,9 +8620,9 @@
           <a:lstStyle xmlns:a="http://schemas.openxmlformats.org/drawingml/2006/main"/>
           <a:p xmlns:a="http://schemas.openxmlformats.org/drawingml/2006/main">
             <a:pPr algn="ctr">
-              <a:defRPr sz="1350" b="1">
-                <a:solidFill>
-                  <a:srgbClr val="FFFFFF"/>
+              <a:defRPr sz="1125" b="1">
+                <a:solidFill>
+                  <a:srgbClr val="2C6E73"/>
                 </a:solidFill>
                 <a:latin typeface="Arial"/>
                 <a:ea typeface="Arial"/>
@@ -8624,9 +8630,9 @@
               </a:defRPr>
             </a:pPr>
             <a:r>
-              <a:rPr sz="1350" b="1">
-                <a:solidFill>
-                  <a:srgbClr val="FFFFFF"/>
+              <a:rPr sz="1125" b="1">
+                <a:solidFill>
+                  <a:srgbClr val="2C6E73"/>
                 </a:solidFill>
                 <a:latin typeface="Arial"/>
                 <a:ea typeface="Arial"/>
@@ -8642,19 +8648,19 @@
           <p:cNvPr id="19" name="">
             <a:extLst xmlns:a="http://schemas.openxmlformats.org/drawingml/2006/main">
               <a:ext uri="{FF2B5EF4-FFF2-40B4-BE49-F238E27FC236}">
-                <a16:creationId xmlns:a16="http://schemas.microsoft.com/office/drawing/2014/main" id="{C2D3D24A-2496-44D8-BBC8-DC7701190514}"/>
-              </a:ext>
-            </a:extLst>
-          </p:cNvPr>
-          <p:cNvSpPr>
-            <a:spLocks xmlns:a="http://schemas.openxmlformats.org/drawingml/2006/main" noGrp="1"/>
-          </p:cNvSpPr>
-          <p:nvPr/>
-        </p:nvSpPr>
-        <p:spPr>
-          <a:xfrm xmlns:a="http://schemas.openxmlformats.org/drawingml/2006/main">
-            <a:off x="1714500" y="3667125"/>
-            <a:ext cx="9429750" cy="609600"/>
+                <a16:creationId xmlns:a16="http://schemas.microsoft.com/office/drawing/2014/main" id="{18185A57-E479-4D07-8BE1-A9771C560C91}"/>
+              </a:ext>
+            </a:extLst>
+          </p:cNvPr>
+          <p:cNvSpPr>
+            <a:spLocks xmlns:a="http://schemas.openxmlformats.org/drawingml/2006/main" noGrp="1"/>
+          </p:cNvSpPr>
+          <p:nvPr/>
+        </p:nvSpPr>
+        <p:spPr>
+          <a:xfrm xmlns:a="http://schemas.openxmlformats.org/drawingml/2006/main">
+            <a:off x="1714500" y="3524250"/>
+            <a:ext cx="9525000" cy="638175"/>
           </a:xfrm>
           <a:prstGeom xmlns:a="http://schemas.openxmlformats.org/drawingml/2006/main" prst="rect">
             <a:avLst/>
@@ -8671,7 +8677,7 @@
           <a:lstStyle xmlns:a="http://schemas.openxmlformats.org/drawingml/2006/main"/>
           <a:p xmlns:a="http://schemas.openxmlformats.org/drawingml/2006/main">
             <a:pPr algn="l">
-              <a:defRPr sz="1500" b="0">
+              <a:defRPr sz="1575" b="0">
                 <a:solidFill>
                   <a:srgbClr val="17253A"/>
                 </a:solidFill>
@@ -8681,7 +8687,7 @@
               </a:defRPr>
             </a:pPr>
             <a:r>
-              <a:rPr sz="1500" b="0">
+              <a:rPr sz="1575" b="0">
                 <a:solidFill>
                   <a:srgbClr val="17253A"/>
                 </a:solidFill>
@@ -8689,7 +8695,7 @@
                 <a:ea typeface="Arial"/>
                 <a:cs typeface="Arial"/>
               </a:rPr>
-              <a:t>Complete the calculation: Compensation: 4,000 + 2,507 - 2 = 6,505.</a:t>
+              <a:t>4,000 + 2,507 = 6,507</a:t>
             </a:r>
           </a:p>
         </p:txBody>
@@ -8699,28 +8705,30 @@
           <p:cNvPr id="20" name="">
             <a:extLst xmlns:a="http://schemas.openxmlformats.org/drawingml/2006/main">
               <a:ext uri="{FF2B5EF4-FFF2-40B4-BE49-F238E27FC236}">
-                <a16:creationId xmlns:a16="http://schemas.microsoft.com/office/drawing/2014/main" id="{6DF073E2-B449-40E9-BC7D-11CE5A9D183E}"/>
-              </a:ext>
-            </a:extLst>
-          </p:cNvPr>
-          <p:cNvSpPr>
-            <a:spLocks xmlns:a="http://schemas.openxmlformats.org/drawingml/2006/main" noGrp="1"/>
-          </p:cNvSpPr>
-          <p:nvPr/>
-        </p:nvSpPr>
-        <p:spPr>
-          <a:xfrm xmlns:a="http://schemas.openxmlformats.org/drawingml/2006/main">
-            <a:off x="1000125" y="4476750"/>
-            <a:ext cx="476250" cy="476250"/>
-          </a:xfrm>
-          <a:prstGeom xmlns:a="http://schemas.openxmlformats.org/drawingml/2006/main" prst="ellipse">
+                <a16:creationId xmlns:a16="http://schemas.microsoft.com/office/drawing/2014/main" id="{DFCEC514-020C-47CD-8602-88A02CE81AB6}"/>
+              </a:ext>
+            </a:extLst>
+          </p:cNvPr>
+          <p:cNvSpPr>
+            <a:spLocks xmlns:a="http://schemas.openxmlformats.org/drawingml/2006/main" noGrp="1"/>
+          </p:cNvSpPr>
+          <p:nvPr/>
+        </p:nvSpPr>
+        <p:spPr>
+          <a:xfrm xmlns:a="http://schemas.openxmlformats.org/drawingml/2006/main">
+            <a:off x="1714500" y="4181475"/>
+            <a:ext cx="9334500" cy="9525"/>
+          </a:xfrm>
+          <a:prstGeom xmlns:a="http://schemas.openxmlformats.org/drawingml/2006/main" prst="rect">
             <a:avLst/>
           </a:prstGeom>
           <a:solidFill xmlns:a="http://schemas.openxmlformats.org/drawingml/2006/main">
-            <a:srgbClr val="2C6E73"/>
+            <a:srgbClr val="D9E0E6"/>
           </a:solidFill>
           <a:ln xmlns:a="http://schemas.openxmlformats.org/drawingml/2006/main" w="0">
-            <a:noFill/>
+            <a:solidFill>
+              <a:srgbClr val="D9E0E6"/>
+            </a:solidFill>
           </a:ln>
         </p:spPr>
       </p:sp>
@@ -8729,19 +8737,19 @@
           <p:cNvPr id="21" name="">
             <a:extLst xmlns:a="http://schemas.openxmlformats.org/drawingml/2006/main">
               <a:ext uri="{FF2B5EF4-FFF2-40B4-BE49-F238E27FC236}">
-                <a16:creationId xmlns:a16="http://schemas.microsoft.com/office/drawing/2014/main" id="{C9244361-AC90-4A39-A011-0BAAD5EF30FF}"/>
-              </a:ext>
-            </a:extLst>
-          </p:cNvPr>
-          <p:cNvSpPr>
-            <a:spLocks xmlns:a="http://schemas.openxmlformats.org/drawingml/2006/main" noGrp="1"/>
-          </p:cNvSpPr>
-          <p:nvPr/>
-        </p:nvSpPr>
-        <p:spPr>
-          <a:xfrm xmlns:a="http://schemas.openxmlformats.org/drawingml/2006/main">
-            <a:off x="1000125" y="4505325"/>
-            <a:ext cx="476250" cy="419100"/>
+                <a16:creationId xmlns:a16="http://schemas.microsoft.com/office/drawing/2014/main" id="{04A78166-B8DE-4621-A145-65FB3EA67697}"/>
+              </a:ext>
+            </a:extLst>
+          </p:cNvPr>
+          <p:cNvSpPr>
+            <a:spLocks xmlns:a="http://schemas.openxmlformats.org/drawingml/2006/main" noGrp="1"/>
+          </p:cNvSpPr>
+          <p:nvPr/>
+        </p:nvSpPr>
+        <p:spPr>
+          <a:xfrm xmlns:a="http://schemas.openxmlformats.org/drawingml/2006/main">
+            <a:off x="1162050" y="4314825"/>
+            <a:ext cx="400050" cy="400050"/>
           </a:xfrm>
           <a:prstGeom xmlns:a="http://schemas.openxmlformats.org/drawingml/2006/main" prst="rect">
             <a:avLst/>
@@ -8758,9 +8766,9 @@
           <a:lstStyle xmlns:a="http://schemas.openxmlformats.org/drawingml/2006/main"/>
           <a:p xmlns:a="http://schemas.openxmlformats.org/drawingml/2006/main">
             <a:pPr algn="ctr">
-              <a:defRPr sz="1350" b="1">
-                <a:solidFill>
-                  <a:srgbClr val="FFFFFF"/>
+              <a:defRPr sz="1125" b="1">
+                <a:solidFill>
+                  <a:srgbClr val="2C6E73"/>
                 </a:solidFill>
                 <a:latin typeface="Arial"/>
                 <a:ea typeface="Arial"/>
@@ -8768,9 +8776,9 @@
               </a:defRPr>
             </a:pPr>
             <a:r>
-              <a:rPr sz="1350" b="1">
-                <a:solidFill>
-                  <a:srgbClr val="FFFFFF"/>
+              <a:rPr sz="1125" b="1">
+                <a:solidFill>
+                  <a:srgbClr val="2C6E73"/>
                 </a:solidFill>
                 <a:latin typeface="Arial"/>
                 <a:ea typeface="Arial"/>
@@ -8786,19 +8794,19 @@
           <p:cNvPr id="22" name="">
             <a:extLst xmlns:a="http://schemas.openxmlformats.org/drawingml/2006/main">
               <a:ext uri="{FF2B5EF4-FFF2-40B4-BE49-F238E27FC236}">
-                <a16:creationId xmlns:a16="http://schemas.microsoft.com/office/drawing/2014/main" id="{775DFAC6-EF68-4EC0-9A24-BB53B7C858E7}"/>
-              </a:ext>
-            </a:extLst>
-          </p:cNvPr>
-          <p:cNvSpPr>
-            <a:spLocks xmlns:a="http://schemas.openxmlformats.org/drawingml/2006/main" noGrp="1"/>
-          </p:cNvSpPr>
-          <p:nvPr/>
-        </p:nvSpPr>
-        <p:spPr>
-          <a:xfrm xmlns:a="http://schemas.openxmlformats.org/drawingml/2006/main">
-            <a:off x="1714500" y="4410075"/>
-            <a:ext cx="9429750" cy="609600"/>
+                <a16:creationId xmlns:a16="http://schemas.microsoft.com/office/drawing/2014/main" id="{F7534D4E-984C-4053-84ED-1ACF41C5DDC4}"/>
+              </a:ext>
+            </a:extLst>
+          </p:cNvPr>
+          <p:cNvSpPr>
+            <a:spLocks xmlns:a="http://schemas.openxmlformats.org/drawingml/2006/main" noGrp="1"/>
+          </p:cNvSpPr>
+          <p:nvPr/>
+        </p:nvSpPr>
+        <p:spPr>
+          <a:xfrm xmlns:a="http://schemas.openxmlformats.org/drawingml/2006/main">
+            <a:off x="1714500" y="4229100"/>
+            <a:ext cx="9525000" cy="638175"/>
           </a:xfrm>
           <a:prstGeom xmlns:a="http://schemas.openxmlformats.org/drawingml/2006/main" prst="rect">
             <a:avLst/>
@@ -8815,9 +8823,9 @@
           <a:lstStyle xmlns:a="http://schemas.openxmlformats.org/drawingml/2006/main"/>
           <a:p xmlns:a="http://schemas.openxmlformats.org/drawingml/2006/main">
             <a:pPr algn="l">
-              <a:defRPr sz="1500" b="1">
-                <a:solidFill>
-                  <a:srgbClr val="2F785D"/>
+              <a:defRPr sz="1575" b="0">
+                <a:solidFill>
+                  <a:srgbClr val="17253A"/>
                 </a:solidFill>
                 <a:latin typeface="Arial"/>
                 <a:ea typeface="Arial"/>
@@ -8825,15 +8833,161 @@
               </a:defRPr>
             </a:pPr>
             <a:r>
-              <a:rPr sz="1500" b="1">
+              <a:rPr sz="1575" b="0">
+                <a:solidFill>
+                  <a:srgbClr val="17253A"/>
+                </a:solidFill>
+                <a:latin typeface="Arial"/>
+                <a:ea typeface="Arial"/>
+                <a:cs typeface="Arial"/>
+              </a:rPr>
+              <a:t>Subtract the extra 2</a:t>
+            </a:r>
+          </a:p>
+        </p:txBody>
+      </p:sp>
+      <p:sp>
+        <p:nvSpPr>
+          <p:cNvPr id="23" name="">
+            <a:extLst xmlns:a="http://schemas.openxmlformats.org/drawingml/2006/main">
+              <a:ext uri="{FF2B5EF4-FFF2-40B4-BE49-F238E27FC236}">
+                <a16:creationId xmlns:a16="http://schemas.microsoft.com/office/drawing/2014/main" id="{67D145B9-7C9C-4245-A1C2-94C07FA06F27}"/>
+              </a:ext>
+            </a:extLst>
+          </p:cNvPr>
+          <p:cNvSpPr>
+            <a:spLocks xmlns:a="http://schemas.openxmlformats.org/drawingml/2006/main" noGrp="1"/>
+          </p:cNvSpPr>
+          <p:nvPr/>
+        </p:nvSpPr>
+        <p:spPr>
+          <a:xfrm xmlns:a="http://schemas.openxmlformats.org/drawingml/2006/main">
+            <a:off x="1714500" y="4886325"/>
+            <a:ext cx="9334500" cy="9525"/>
+          </a:xfrm>
+          <a:prstGeom xmlns:a="http://schemas.openxmlformats.org/drawingml/2006/main" prst="rect">
+            <a:avLst/>
+          </a:prstGeom>
+          <a:solidFill xmlns:a="http://schemas.openxmlformats.org/drawingml/2006/main">
+            <a:srgbClr val="D9E0E6"/>
+          </a:solidFill>
+          <a:ln xmlns:a="http://schemas.openxmlformats.org/drawingml/2006/main" w="0">
+            <a:solidFill>
+              <a:srgbClr val="D9E0E6"/>
+            </a:solidFill>
+          </a:ln>
+        </p:spPr>
+      </p:sp>
+      <p:sp>
+        <p:nvSpPr>
+          <p:cNvPr id="24" name="">
+            <a:extLst xmlns:a="http://schemas.openxmlformats.org/drawingml/2006/main">
+              <a:ext uri="{FF2B5EF4-FFF2-40B4-BE49-F238E27FC236}">
+                <a16:creationId xmlns:a16="http://schemas.microsoft.com/office/drawing/2014/main" id="{8289157B-F952-463C-A975-04DC8A075732}"/>
+              </a:ext>
+            </a:extLst>
+          </p:cNvPr>
+          <p:cNvSpPr>
+            <a:spLocks xmlns:a="http://schemas.openxmlformats.org/drawingml/2006/main" noGrp="1"/>
+          </p:cNvSpPr>
+          <p:nvPr/>
+        </p:nvSpPr>
+        <p:spPr>
+          <a:xfrm xmlns:a="http://schemas.openxmlformats.org/drawingml/2006/main">
+            <a:off x="1162050" y="5019675"/>
+            <a:ext cx="400050" cy="400050"/>
+          </a:xfrm>
+          <a:prstGeom xmlns:a="http://schemas.openxmlformats.org/drawingml/2006/main" prst="rect">
+            <a:avLst/>
+          </a:prstGeom>
+          <a:noFill xmlns:a="http://schemas.openxmlformats.org/drawingml/2006/main"/>
+          <a:ln xmlns:a="http://schemas.openxmlformats.org/drawingml/2006/main" w="0">
+            <a:noFill/>
+          </a:ln>
+        </p:spPr>
+        <p:txBody>
+          <a:bodyPr xmlns:a="http://schemas.openxmlformats.org/drawingml/2006/main" anchor="ctr">
+            <a:normAutofit fontScale="100000"/>
+          </a:bodyPr>
+          <a:lstStyle xmlns:a="http://schemas.openxmlformats.org/drawingml/2006/main"/>
+          <a:p xmlns:a="http://schemas.openxmlformats.org/drawingml/2006/main">
+            <a:pPr algn="ctr">
+              <a:defRPr sz="1125" b="1">
                 <a:solidFill>
                   <a:srgbClr val="2F785D"/>
                 </a:solidFill>
                 <a:latin typeface="Arial"/>
                 <a:ea typeface="Arial"/>
                 <a:cs typeface="Arial"/>
+              </a:defRPr>
+            </a:pPr>
+            <a:r>
+              <a:rPr sz="1125" b="1">
+                <a:solidFill>
+                  <a:srgbClr val="2F785D"/>
+                </a:solidFill>
+                <a:latin typeface="Arial"/>
+                <a:ea typeface="Arial"/>
+                <a:cs typeface="Arial"/>
               </a:rPr>
-              <a:t>Check the result: Check the size of the result using estimation or an inverse operation.</a:t>
+              <a:t>5</a:t>
+            </a:r>
+          </a:p>
+        </p:txBody>
+      </p:sp>
+      <p:sp>
+        <p:nvSpPr>
+          <p:cNvPr id="25" name="">
+            <a:extLst xmlns:a="http://schemas.openxmlformats.org/drawingml/2006/main">
+              <a:ext uri="{FF2B5EF4-FFF2-40B4-BE49-F238E27FC236}">
+                <a16:creationId xmlns:a16="http://schemas.microsoft.com/office/drawing/2014/main" id="{77F3E4B1-36F4-416D-BA18-C45656BCA7E6}"/>
+              </a:ext>
+            </a:extLst>
+          </p:cNvPr>
+          <p:cNvSpPr>
+            <a:spLocks xmlns:a="http://schemas.openxmlformats.org/drawingml/2006/main" noGrp="1"/>
+          </p:cNvSpPr>
+          <p:nvPr/>
+        </p:nvSpPr>
+        <p:spPr>
+          <a:xfrm xmlns:a="http://schemas.openxmlformats.org/drawingml/2006/main">
+            <a:off x="1714500" y="4933950"/>
+            <a:ext cx="9525000" cy="638175"/>
+          </a:xfrm>
+          <a:prstGeom xmlns:a="http://schemas.openxmlformats.org/drawingml/2006/main" prst="rect">
+            <a:avLst/>
+          </a:prstGeom>
+          <a:noFill xmlns:a="http://schemas.openxmlformats.org/drawingml/2006/main"/>
+          <a:ln xmlns:a="http://schemas.openxmlformats.org/drawingml/2006/main" w="0">
+            <a:noFill/>
+          </a:ln>
+        </p:spPr>
+        <p:txBody>
+          <a:bodyPr xmlns:a="http://schemas.openxmlformats.org/drawingml/2006/main" anchor="ctr">
+            <a:normAutofit fontScale="100000"/>
+          </a:bodyPr>
+          <a:lstStyle xmlns:a="http://schemas.openxmlformats.org/drawingml/2006/main"/>
+          <a:p xmlns:a="http://schemas.openxmlformats.org/drawingml/2006/main">
+            <a:pPr algn="l">
+              <a:defRPr sz="1575" b="1">
+                <a:solidFill>
+                  <a:srgbClr val="2F785D"/>
+                </a:solidFill>
+                <a:latin typeface="Arial"/>
+                <a:ea typeface="Arial"/>
+                <a:cs typeface="Arial"/>
+              </a:defRPr>
+            </a:pPr>
+            <a:r>
+              <a:rPr sz="1575" b="1">
+                <a:solidFill>
+                  <a:srgbClr val="2F785D"/>
+                </a:solidFill>
+                <a:latin typeface="Arial"/>
+                <a:ea typeface="Arial"/>
+                <a:cs typeface="Arial"/>
+              </a:rPr>
+              <a:t>6,507 - 2 = 6,505</a:t>
             </a:r>
           </a:p>
         </p:txBody>
@@ -8841,7 +8995,7 @@
     </p:spTree>
     <p:extLst>
       <p:ext uri="{BB962C8B-B14F-4D97-AF65-F5344CB8AC3E}">
-        <p14:creationId xmlns:p14="http://schemas.microsoft.com/office/powerpoint/2010/main" val="213996630"/>
+        <p14:creationId xmlns:p14="http://schemas.microsoft.com/office/powerpoint/2010/main" val="199407620"/>
       </p:ext>
     </p:extLst>
   </p:cSld>
@@ -9078,6 +9232,51 @@
                       </p:childTnLst>
                     </p:cTn>
                   </p:par>
+                  <p:par>
+                    <p:cTn id="23" fill="hold">
+                      <p:stCondLst>
+                        <p:cond delay="indefinite"/>
+                      </p:stCondLst>
+                      <p:childTnLst>
+                        <p:par>
+                          <p:cTn id="24" fill="hold">
+                            <p:stCondLst>
+                              <p:cond delay="0"/>
+                            </p:stCondLst>
+                            <p:childTnLst>
+                              <p:par>
+                                <p:cTn id="25" presetID="1" presetClass="entr" presetSubtype="0" fill="hold" grpId="0" nodeType="clickEffect">
+                                  <p:stCondLst>
+                                    <p:cond delay="0"/>
+                                  </p:stCondLst>
+                                  <p:childTnLst>
+                                    <p:set>
+                                      <p:cBhvr>
+                                        <p:cTn id="26" dur="1" fill="hold">
+                                          <p:stCondLst>
+                                            <p:cond delay="0"/>
+                                          </p:stCondLst>
+                                        </p:cTn>
+                                        <p:tgtEl>
+                                          <p:spTgt spid="25"/>
+                                        </p:tgtEl>
+                                        <p:attrNameLst>
+                                          <p:attrName>style.visibility</p:attrName>
+                                        </p:attrNameLst>
+                                      </p:cBhvr>
+                                      <p:to>
+                                        <p:strVal val="visible"/>
+                                      </p:to>
+                                    </p:set>
+                                  </p:childTnLst>
+                                </p:cTn>
+                              </p:par>
+                            </p:childTnLst>
+                          </p:cTn>
+                        </p:par>
+                      </p:childTnLst>
+                    </p:cTn>
+                  </p:par>
                 </p:childTnLst>
               </p:cTn>
               <p:prevCondLst>
@@ -9105,6 +9304,7 @@
       <p:bldP spid="16" grpId="0"/>
       <p:bldP spid="19" grpId="0"/>
       <p:bldP spid="22" grpId="0"/>
+      <p:bldP spid="25" grpId="0"/>
     </p:bldLst>
   </p:timing>
 </p:sld>
@@ -9134,7 +9334,7 @@
           <p:cNvPr id="15" name="">
             <a:extLst xmlns:a="http://schemas.openxmlformats.org/drawingml/2006/main">
               <a:ext uri="{FF2B5EF4-FFF2-40B4-BE49-F238E27FC236}">
-                <a16:creationId xmlns:a16="http://schemas.microsoft.com/office/drawing/2014/main" id="{7BEA01C2-753F-4ADB-85C6-D43D51213AEE}"/>
+                <a16:creationId xmlns:a16="http://schemas.microsoft.com/office/drawing/2014/main" id="{6FC8060F-D84E-4438-A093-8DC5025E9EEC}"/>
               </a:ext>
             </a:extLst>
           </p:cNvPr>
@@ -9166,7 +9366,7 @@
           <p:cNvPr id="2" name="">
             <a:extLst xmlns:a="http://schemas.openxmlformats.org/drawingml/2006/main">
               <a:ext uri="{FF2B5EF4-FFF2-40B4-BE49-F238E27FC236}">
-                <a16:creationId xmlns:a16="http://schemas.microsoft.com/office/drawing/2014/main" id="{EDF46FD8-4F3D-4DD8-9FB0-D8DFCC2422E9}"/>
+                <a16:creationId xmlns:a16="http://schemas.microsoft.com/office/drawing/2014/main" id="{B3BCCDF2-98DC-4298-A5C1-1F2AFD6B7A99}"/>
               </a:ext>
             </a:extLst>
           </p:cNvPr>
@@ -9223,7 +9423,7 @@
           <p:cNvPr id="3" name="">
             <a:extLst xmlns:a="http://schemas.openxmlformats.org/drawingml/2006/main">
               <a:ext uri="{FF2B5EF4-FFF2-40B4-BE49-F238E27FC236}">
-                <a16:creationId xmlns:a16="http://schemas.microsoft.com/office/drawing/2014/main" id="{40FF2E2C-2A43-4577-A9A0-F49D54ED9B3B}"/>
+                <a16:creationId xmlns:a16="http://schemas.microsoft.com/office/drawing/2014/main" id="{05A2F7CB-3245-4C5F-881C-93453519CD1F}"/>
               </a:ext>
             </a:extLst>
           </p:cNvPr>
@@ -9255,7 +9455,7 @@
           <p:cNvPr id="4" name="">
             <a:extLst xmlns:a="http://schemas.openxmlformats.org/drawingml/2006/main">
               <a:ext uri="{FF2B5EF4-FFF2-40B4-BE49-F238E27FC236}">
-                <a16:creationId xmlns:a16="http://schemas.microsoft.com/office/drawing/2014/main" id="{2E7DC77F-E63F-4BD0-A867-81752F60E837}"/>
+                <a16:creationId xmlns:a16="http://schemas.microsoft.com/office/drawing/2014/main" id="{02D599CA-B1C2-4DFD-9233-E1C24491E316}"/>
               </a:ext>
             </a:extLst>
           </p:cNvPr>
@@ -9312,7 +9512,7 @@
           <p:cNvPr id="5" name="">
             <a:extLst xmlns:a="http://schemas.openxmlformats.org/drawingml/2006/main">
               <a:ext uri="{FF2B5EF4-FFF2-40B4-BE49-F238E27FC236}">
-                <a16:creationId xmlns:a16="http://schemas.microsoft.com/office/drawing/2014/main" id="{E153FD10-1981-4978-AFA7-5E694CCE8085}"/>
+                <a16:creationId xmlns:a16="http://schemas.microsoft.com/office/drawing/2014/main" id="{6788412B-D0EC-4FB6-A978-B12A344F8008}"/>
               </a:ext>
             </a:extLst>
           </p:cNvPr>
@@ -9369,7 +9569,7 @@
           <p:cNvPr id="6" name="">
             <a:extLst xmlns:a="http://schemas.openxmlformats.org/drawingml/2006/main">
               <a:ext uri="{FF2B5EF4-FFF2-40B4-BE49-F238E27FC236}">
-                <a16:creationId xmlns:a16="http://schemas.microsoft.com/office/drawing/2014/main" id="{1AA5BED3-4F43-4EE2-A0C8-4AD7B2738BD7}"/>
+                <a16:creationId xmlns:a16="http://schemas.microsoft.com/office/drawing/2014/main" id="{8E6555DC-7B94-42DB-9D40-42B834A566BB}"/>
               </a:ext>
             </a:extLst>
           </p:cNvPr>
@@ -9426,7 +9626,7 @@
           <p:cNvPr id="7" name="">
             <a:extLst xmlns:a="http://schemas.openxmlformats.org/drawingml/2006/main">
               <a:ext uri="{FF2B5EF4-FFF2-40B4-BE49-F238E27FC236}">
-                <a16:creationId xmlns:a16="http://schemas.microsoft.com/office/drawing/2014/main" id="{A5295972-A2CE-4DFC-9BB0-E07B2F686D20}"/>
+                <a16:creationId xmlns:a16="http://schemas.microsoft.com/office/drawing/2014/main" id="{48EA967E-BB83-437B-9865-BFEDF1F3BA03}"/>
               </a:ext>
             </a:extLst>
           </p:cNvPr>
@@ -9458,7 +9658,7 @@
           <p:cNvPr id="8" name="">
             <a:extLst xmlns:a="http://schemas.openxmlformats.org/drawingml/2006/main">
               <a:ext uri="{FF2B5EF4-FFF2-40B4-BE49-F238E27FC236}">
-                <a16:creationId xmlns:a16="http://schemas.microsoft.com/office/drawing/2014/main" id="{B56E5334-F07A-4251-A9A2-A6529CA1C213}"/>
+                <a16:creationId xmlns:a16="http://schemas.microsoft.com/office/drawing/2014/main" id="{1E90ED0E-5A42-46EB-AE81-5DAC542EDB28}"/>
               </a:ext>
             </a:extLst>
           </p:cNvPr>
@@ -9515,7 +9715,7 @@
           <p:cNvPr id="9" name="">
             <a:extLst xmlns:a="http://schemas.openxmlformats.org/drawingml/2006/main">
               <a:ext uri="{FF2B5EF4-FFF2-40B4-BE49-F238E27FC236}">
-                <a16:creationId xmlns:a16="http://schemas.microsoft.com/office/drawing/2014/main" id="{59B2DE8C-DC03-4ADE-BF86-47902286DE98}"/>
+                <a16:creationId xmlns:a16="http://schemas.microsoft.com/office/drawing/2014/main" id="{AD4C0103-991F-4AA3-92E0-3F708F9D81ED}"/>
               </a:ext>
             </a:extLst>
           </p:cNvPr>
@@ -9572,7 +9772,7 @@
           <p:cNvPr id="10" name="">
             <a:extLst xmlns:a="http://schemas.openxmlformats.org/drawingml/2006/main">
               <a:ext uri="{FF2B5EF4-FFF2-40B4-BE49-F238E27FC236}">
-                <a16:creationId xmlns:a16="http://schemas.microsoft.com/office/drawing/2014/main" id="{E2328087-AE1E-4658-8F56-3A40F86AB8DA}"/>
+                <a16:creationId xmlns:a16="http://schemas.microsoft.com/office/drawing/2014/main" id="{471E7337-21EE-45A7-820C-E5A4DAF3105D}"/>
               </a:ext>
             </a:extLst>
           </p:cNvPr>
@@ -9629,7 +9829,7 @@
           <p:cNvPr id="11" name="">
             <a:extLst xmlns:a="http://schemas.openxmlformats.org/drawingml/2006/main">
               <a:ext uri="{FF2B5EF4-FFF2-40B4-BE49-F238E27FC236}">
-                <a16:creationId xmlns:a16="http://schemas.microsoft.com/office/drawing/2014/main" id="{AC2CF1AE-2424-42E3-B9D1-BC907085642A}"/>
+                <a16:creationId xmlns:a16="http://schemas.microsoft.com/office/drawing/2014/main" id="{14F85CB3-532F-46BE-8DE4-10A4628CFB65}"/>
               </a:ext>
             </a:extLst>
           </p:cNvPr>
@@ -9686,7 +9886,7 @@
           <p:cNvPr id="12" name="">
             <a:extLst xmlns:a="http://schemas.openxmlformats.org/drawingml/2006/main">
               <a:ext uri="{FF2B5EF4-FFF2-40B4-BE49-F238E27FC236}">
-                <a16:creationId xmlns:a16="http://schemas.microsoft.com/office/drawing/2014/main" id="{D9114B6F-8DFE-4280-90A0-8C5C935E3472}"/>
+                <a16:creationId xmlns:a16="http://schemas.microsoft.com/office/drawing/2014/main" id="{2A23CC10-02AC-400D-A34F-E3F4DECDE10C}"/>
               </a:ext>
             </a:extLst>
           </p:cNvPr>
@@ -9718,7 +9918,7 @@
           <p:cNvPr id="13" name="">
             <a:extLst xmlns:a="http://schemas.openxmlformats.org/drawingml/2006/main">
               <a:ext uri="{FF2B5EF4-FFF2-40B4-BE49-F238E27FC236}">
-                <a16:creationId xmlns:a16="http://schemas.microsoft.com/office/drawing/2014/main" id="{7FAEE897-01FE-439F-8924-37584EB78D92}"/>
+                <a16:creationId xmlns:a16="http://schemas.microsoft.com/office/drawing/2014/main" id="{A2523880-0FD8-42E7-96D7-11EAB8A2A966}"/>
               </a:ext>
             </a:extLst>
           </p:cNvPr>
@@ -9775,7 +9975,7 @@
           <p:cNvPr id="14" name="">
             <a:extLst xmlns:a="http://schemas.openxmlformats.org/drawingml/2006/main">
               <a:ext uri="{FF2B5EF4-FFF2-40B4-BE49-F238E27FC236}">
-                <a16:creationId xmlns:a16="http://schemas.microsoft.com/office/drawing/2014/main" id="{3763B8A8-2574-4E63-96FF-BBEE16498268}"/>
+                <a16:creationId xmlns:a16="http://schemas.microsoft.com/office/drawing/2014/main" id="{6D47F96A-53F4-463C-8D09-3139370C49FA}"/>
               </a:ext>
             </a:extLst>
           </p:cNvPr>
@@ -9830,7 +10030,7 @@
     </p:spTree>
     <p:extLst>
       <p:ext uri="{BB962C8B-B14F-4D97-AF65-F5344CB8AC3E}">
-        <p14:creationId xmlns:p14="http://schemas.microsoft.com/office/powerpoint/2010/main" val="370129347"/>
+        <p14:creationId xmlns:p14="http://schemas.microsoft.com/office/powerpoint/2010/main" val="219900798"/>
       </p:ext>
     </p:extLst>
   </p:cSld>
@@ -10031,7 +10231,7 @@
           <p:cNvPr id="16" name="">
             <a:extLst xmlns:a="http://schemas.openxmlformats.org/drawingml/2006/main">
               <a:ext uri="{FF2B5EF4-FFF2-40B4-BE49-F238E27FC236}">
-                <a16:creationId xmlns:a16="http://schemas.microsoft.com/office/drawing/2014/main" id="{ECFD5146-AFF9-4616-B437-3B3A4F01BD1A}"/>
+                <a16:creationId xmlns:a16="http://schemas.microsoft.com/office/drawing/2014/main" id="{9C618850-4059-4699-AA2E-5B4BD2C3CB53}"/>
               </a:ext>
             </a:extLst>
           </p:cNvPr>
@@ -10063,7 +10263,7 @@
           <p:cNvPr id="2" name="">
             <a:extLst xmlns:a="http://schemas.openxmlformats.org/drawingml/2006/main">
               <a:ext uri="{FF2B5EF4-FFF2-40B4-BE49-F238E27FC236}">
-                <a16:creationId xmlns:a16="http://schemas.microsoft.com/office/drawing/2014/main" id="{9E7B04AD-1377-4626-AA4A-BE1C4A65CC58}"/>
+                <a16:creationId xmlns:a16="http://schemas.microsoft.com/office/drawing/2014/main" id="{7009980B-679F-4308-8DDD-1BA2DF8B57B7}"/>
               </a:ext>
             </a:extLst>
           </p:cNvPr>
@@ -10120,7 +10320,7 @@
           <p:cNvPr id="3" name="">
             <a:extLst xmlns:a="http://schemas.openxmlformats.org/drawingml/2006/main">
               <a:ext uri="{FF2B5EF4-FFF2-40B4-BE49-F238E27FC236}">
-                <a16:creationId xmlns:a16="http://schemas.microsoft.com/office/drawing/2014/main" id="{A5373B03-3690-4130-AE1A-C47AAA5B9240}"/>
+                <a16:creationId xmlns:a16="http://schemas.microsoft.com/office/drawing/2014/main" id="{5470AC32-3A4C-45E7-9A17-72DC7682B749}"/>
               </a:ext>
             </a:extLst>
           </p:cNvPr>
@@ -10152,7 +10352,7 @@
           <p:cNvPr id="4" name="">
             <a:extLst xmlns:a="http://schemas.openxmlformats.org/drawingml/2006/main">
               <a:ext uri="{FF2B5EF4-FFF2-40B4-BE49-F238E27FC236}">
-                <a16:creationId xmlns:a16="http://schemas.microsoft.com/office/drawing/2014/main" id="{1196143B-7610-47CC-A311-A5F697B5CB25}"/>
+                <a16:creationId xmlns:a16="http://schemas.microsoft.com/office/drawing/2014/main" id="{E176EC8C-7A5E-4DCF-B823-EF8473A4C901}"/>
               </a:ext>
             </a:extLst>
           </p:cNvPr>
@@ -10209,7 +10409,7 @@
           <p:cNvPr id="5" name="">
             <a:extLst xmlns:a="http://schemas.openxmlformats.org/drawingml/2006/main">
               <a:ext uri="{FF2B5EF4-FFF2-40B4-BE49-F238E27FC236}">
-                <a16:creationId xmlns:a16="http://schemas.microsoft.com/office/drawing/2014/main" id="{20B87A43-D0A5-40E5-AFA6-57315813C0C6}"/>
+                <a16:creationId xmlns:a16="http://schemas.microsoft.com/office/drawing/2014/main" id="{958C73FA-0CBB-4594-B67C-C3A3B6DCB464}"/>
               </a:ext>
             </a:extLst>
           </p:cNvPr>
@@ -10266,7 +10466,7 @@
           <p:cNvPr id="6" name="">
             <a:extLst xmlns:a="http://schemas.openxmlformats.org/drawingml/2006/main">
               <a:ext uri="{FF2B5EF4-FFF2-40B4-BE49-F238E27FC236}">
-                <a16:creationId xmlns:a16="http://schemas.microsoft.com/office/drawing/2014/main" id="{1C33A478-2B68-4911-A090-2EE30FCB69DA}"/>
+                <a16:creationId xmlns:a16="http://schemas.microsoft.com/office/drawing/2014/main" id="{FFFEAA33-35E2-4644-B4AB-D20810270E92}"/>
               </a:ext>
             </a:extLst>
           </p:cNvPr>
@@ -10323,7 +10523,7 @@
           <p:cNvPr id="7" name="">
             <a:extLst xmlns:a="http://schemas.openxmlformats.org/drawingml/2006/main">
               <a:ext uri="{FF2B5EF4-FFF2-40B4-BE49-F238E27FC236}">
-                <a16:creationId xmlns:a16="http://schemas.microsoft.com/office/drawing/2014/main" id="{20CE4AF5-2B3A-48AF-88DA-AC6B8014B315}"/>
+                <a16:creationId xmlns:a16="http://schemas.microsoft.com/office/drawing/2014/main" id="{9AC35075-AE46-4A2F-B3D9-5399A5BD8AF1}"/>
               </a:ext>
             </a:extLst>
           </p:cNvPr>
@@ -10355,7 +10555,7 @@
           <p:cNvPr id="8" name="">
             <a:extLst xmlns:a="http://schemas.openxmlformats.org/drawingml/2006/main">
               <a:ext uri="{FF2B5EF4-FFF2-40B4-BE49-F238E27FC236}">
-                <a16:creationId xmlns:a16="http://schemas.microsoft.com/office/drawing/2014/main" id="{930A15E6-C7AD-4EAB-B065-D65ADA70AEF7}"/>
+                <a16:creationId xmlns:a16="http://schemas.microsoft.com/office/drawing/2014/main" id="{8F28D237-0E9A-438B-8A70-8688512B7105}"/>
               </a:ext>
             </a:extLst>
           </p:cNvPr>
@@ -10412,7 +10612,7 @@
           <p:cNvPr id="9" name="">
             <a:extLst xmlns:a="http://schemas.openxmlformats.org/drawingml/2006/main">
               <a:ext uri="{FF2B5EF4-FFF2-40B4-BE49-F238E27FC236}">
-                <a16:creationId xmlns:a16="http://schemas.microsoft.com/office/drawing/2014/main" id="{CE944DCC-723E-4178-A56C-45F0AC7FC463}"/>
+                <a16:creationId xmlns:a16="http://schemas.microsoft.com/office/drawing/2014/main" id="{03866CE1-D47A-4AAE-820B-9D4E3B2A3BE8}"/>
               </a:ext>
             </a:extLst>
           </p:cNvPr>
@@ -10469,7 +10669,7 @@
           <p:cNvPr id="10" name="">
             <a:extLst xmlns:a="http://schemas.openxmlformats.org/drawingml/2006/main">
               <a:ext uri="{FF2B5EF4-FFF2-40B4-BE49-F238E27FC236}">
-                <a16:creationId xmlns:a16="http://schemas.microsoft.com/office/drawing/2014/main" id="{C57E201A-D83D-410A-89FC-0A9CC597FC0A}"/>
+                <a16:creationId xmlns:a16="http://schemas.microsoft.com/office/drawing/2014/main" id="{1E4A94EF-E990-4E95-A854-939669989BCE}"/>
               </a:ext>
             </a:extLst>
           </p:cNvPr>
@@ -10526,7 +10726,7 @@
           <p:cNvPr id="11" name="">
             <a:extLst xmlns:a="http://schemas.openxmlformats.org/drawingml/2006/main">
               <a:ext uri="{FF2B5EF4-FFF2-40B4-BE49-F238E27FC236}">
-                <a16:creationId xmlns:a16="http://schemas.microsoft.com/office/drawing/2014/main" id="{94CB697E-F6AD-4E3A-B988-92FEF4F24488}"/>
+                <a16:creationId xmlns:a16="http://schemas.microsoft.com/office/drawing/2014/main" id="{8D225CBE-0CDC-41E4-B62C-402A15BB6A8E}"/>
               </a:ext>
             </a:extLst>
           </p:cNvPr>
@@ -10583,7 +10783,7 @@
           <p:cNvPr id="12" name="">
             <a:extLst xmlns:a="http://schemas.openxmlformats.org/drawingml/2006/main">
               <a:ext uri="{FF2B5EF4-FFF2-40B4-BE49-F238E27FC236}">
-                <a16:creationId xmlns:a16="http://schemas.microsoft.com/office/drawing/2014/main" id="{FB6A7469-EC75-4E83-8B91-A1FD8CECF3A7}"/>
+                <a16:creationId xmlns:a16="http://schemas.microsoft.com/office/drawing/2014/main" id="{27ADEEAC-82DC-4AAC-BF0A-14B94407F5AF}"/>
               </a:ext>
             </a:extLst>
           </p:cNvPr>
@@ -10640,7 +10840,7 @@
           <p:cNvPr id="13" name="">
             <a:extLst xmlns:a="http://schemas.openxmlformats.org/drawingml/2006/main">
               <a:ext uri="{FF2B5EF4-FFF2-40B4-BE49-F238E27FC236}">
-                <a16:creationId xmlns:a16="http://schemas.microsoft.com/office/drawing/2014/main" id="{0FBCF118-B8CC-4EF7-B8D8-F60CDEA2ECAA}"/>
+                <a16:creationId xmlns:a16="http://schemas.microsoft.com/office/drawing/2014/main" id="{4EFC9D58-3D22-4D76-931C-49D6AD039F7F}"/>
               </a:ext>
             </a:extLst>
           </p:cNvPr>
@@ -10697,7 +10897,7 @@
           <p:cNvPr id="14" name="">
             <a:extLst xmlns:a="http://schemas.openxmlformats.org/drawingml/2006/main">
               <a:ext uri="{FF2B5EF4-FFF2-40B4-BE49-F238E27FC236}">
-                <a16:creationId xmlns:a16="http://schemas.microsoft.com/office/drawing/2014/main" id="{B161EB16-4D81-46D9-B93C-54CC28BEB5A2}"/>
+                <a16:creationId xmlns:a16="http://schemas.microsoft.com/office/drawing/2014/main" id="{5BE7A96B-DCFD-4F3C-BCBA-5DA7DECDAADE}"/>
               </a:ext>
             </a:extLst>
           </p:cNvPr>
@@ -10754,7 +10954,7 @@
           <p:cNvPr id="15" name="">
             <a:extLst xmlns:a="http://schemas.openxmlformats.org/drawingml/2006/main">
               <a:ext uri="{FF2B5EF4-FFF2-40B4-BE49-F238E27FC236}">
-                <a16:creationId xmlns:a16="http://schemas.microsoft.com/office/drawing/2014/main" id="{E1C6F97D-C1D6-49F0-923D-CA9D30C6D8CD}"/>
+                <a16:creationId xmlns:a16="http://schemas.microsoft.com/office/drawing/2014/main" id="{5F16A201-C019-4ED7-8EFA-8E27D22DB992}"/>
               </a:ext>
             </a:extLst>
           </p:cNvPr>
@@ -10809,7 +11009,7 @@
     </p:spTree>
     <p:extLst>
       <p:ext uri="{BB962C8B-B14F-4D97-AF65-F5344CB8AC3E}">
-        <p14:creationId xmlns:p14="http://schemas.microsoft.com/office/powerpoint/2010/main" val="1705400062"/>
+        <p14:creationId xmlns:p14="http://schemas.microsoft.com/office/powerpoint/2010/main" val="572730953"/>
       </p:ext>
     </p:extLst>
   </p:cSld>
@@ -10964,7 +11164,7 @@
           <p:cNvPr id="16" name="">
             <a:extLst xmlns:a="http://schemas.openxmlformats.org/drawingml/2006/main">
               <a:ext uri="{FF2B5EF4-FFF2-40B4-BE49-F238E27FC236}">
-                <a16:creationId xmlns:a16="http://schemas.microsoft.com/office/drawing/2014/main" id="{4C7E1873-CF4C-46B1-A8F3-8A291999EAE8}"/>
+                <a16:creationId xmlns:a16="http://schemas.microsoft.com/office/drawing/2014/main" id="{1C80A8D3-BB05-4376-8363-816FB98BEE29}"/>
               </a:ext>
             </a:extLst>
           </p:cNvPr>
@@ -10996,7 +11196,7 @@
           <p:cNvPr id="2" name="">
             <a:extLst xmlns:a="http://schemas.openxmlformats.org/drawingml/2006/main">
               <a:ext uri="{FF2B5EF4-FFF2-40B4-BE49-F238E27FC236}">
-                <a16:creationId xmlns:a16="http://schemas.microsoft.com/office/drawing/2014/main" id="{119EB55A-713D-47FC-A044-79660FBA3C96}"/>
+                <a16:creationId xmlns:a16="http://schemas.microsoft.com/office/drawing/2014/main" id="{F6F45CF7-1CC7-4B0C-ACFD-D045D71D7DF7}"/>
               </a:ext>
             </a:extLst>
           </p:cNvPr>
@@ -11053,7 +11253,7 @@
           <p:cNvPr id="3" name="">
             <a:extLst xmlns:a="http://schemas.openxmlformats.org/drawingml/2006/main">
               <a:ext uri="{FF2B5EF4-FFF2-40B4-BE49-F238E27FC236}">
-                <a16:creationId xmlns:a16="http://schemas.microsoft.com/office/drawing/2014/main" id="{B8BADE55-EDBE-458E-A99A-8C55B18AB79B}"/>
+                <a16:creationId xmlns:a16="http://schemas.microsoft.com/office/drawing/2014/main" id="{C7330BF9-3AE4-444C-8EE6-89EB1DE82DC7}"/>
               </a:ext>
             </a:extLst>
           </p:cNvPr>
@@ -11085,7 +11285,7 @@
           <p:cNvPr id="4" name="">
             <a:extLst xmlns:a="http://schemas.openxmlformats.org/drawingml/2006/main">
               <a:ext uri="{FF2B5EF4-FFF2-40B4-BE49-F238E27FC236}">
-                <a16:creationId xmlns:a16="http://schemas.microsoft.com/office/drawing/2014/main" id="{47A17DA4-C007-4A20-882E-7D7DB1EDB2DA}"/>
+                <a16:creationId xmlns:a16="http://schemas.microsoft.com/office/drawing/2014/main" id="{2C505DCF-7D3C-47D0-B122-022EAEE6C1FE}"/>
               </a:ext>
             </a:extLst>
           </p:cNvPr>
@@ -11142,7 +11342,7 @@
           <p:cNvPr id="5" name="">
             <a:extLst xmlns:a="http://schemas.openxmlformats.org/drawingml/2006/main">
               <a:ext uri="{FF2B5EF4-FFF2-40B4-BE49-F238E27FC236}">
-                <a16:creationId xmlns:a16="http://schemas.microsoft.com/office/drawing/2014/main" id="{95592021-A10D-49C8-ACAF-9B1D03ECEBA7}"/>
+                <a16:creationId xmlns:a16="http://schemas.microsoft.com/office/drawing/2014/main" id="{1C400BA2-333D-4DB5-8D83-95180F567EF6}"/>
               </a:ext>
             </a:extLst>
           </p:cNvPr>
@@ -11199,7 +11399,7 @@
           <p:cNvPr id="6" name="">
             <a:extLst xmlns:a="http://schemas.openxmlformats.org/drawingml/2006/main">
               <a:ext uri="{FF2B5EF4-FFF2-40B4-BE49-F238E27FC236}">
-                <a16:creationId xmlns:a16="http://schemas.microsoft.com/office/drawing/2014/main" id="{DD4338D4-0330-4609-B22B-5AD68126CD27}"/>
+                <a16:creationId xmlns:a16="http://schemas.microsoft.com/office/drawing/2014/main" id="{AEE2026F-C8D4-4589-9CBF-7BC8EBE3579B}"/>
               </a:ext>
             </a:extLst>
           </p:cNvPr>
@@ -11256,7 +11456,7 @@
           <p:cNvPr id="7" name="">
             <a:extLst xmlns:a="http://schemas.openxmlformats.org/drawingml/2006/main">
               <a:ext uri="{FF2B5EF4-FFF2-40B4-BE49-F238E27FC236}">
-                <a16:creationId xmlns:a16="http://schemas.microsoft.com/office/drawing/2014/main" id="{CE3CF3F7-A197-4DA8-8AA5-6CBC15DA81A9}"/>
+                <a16:creationId xmlns:a16="http://schemas.microsoft.com/office/drawing/2014/main" id="{A02AF26E-076F-496C-A029-49649C477984}"/>
               </a:ext>
             </a:extLst>
           </p:cNvPr>
@@ -11288,7 +11488,7 @@
           <p:cNvPr id="8" name="">
             <a:extLst xmlns:a="http://schemas.openxmlformats.org/drawingml/2006/main">
               <a:ext uri="{FF2B5EF4-FFF2-40B4-BE49-F238E27FC236}">
-                <a16:creationId xmlns:a16="http://schemas.microsoft.com/office/drawing/2014/main" id="{478FD43C-A13B-4A4D-8693-864676F4E573}"/>
+                <a16:creationId xmlns:a16="http://schemas.microsoft.com/office/drawing/2014/main" id="{5B19A701-89F0-44EC-A84E-860B97C70F65}"/>
               </a:ext>
             </a:extLst>
           </p:cNvPr>
@@ -11345,7 +11545,7 @@
           <p:cNvPr id="9" name="">
             <a:extLst xmlns:a="http://schemas.openxmlformats.org/drawingml/2006/main">
               <a:ext uri="{FF2B5EF4-FFF2-40B4-BE49-F238E27FC236}">
-                <a16:creationId xmlns:a16="http://schemas.microsoft.com/office/drawing/2014/main" id="{7CEFADC5-8CB2-4615-A770-6BB4E506C8F7}"/>
+                <a16:creationId xmlns:a16="http://schemas.microsoft.com/office/drawing/2014/main" id="{5F1B8216-3DDC-4CF0-AE22-76B0F6BF46E7}"/>
               </a:ext>
             </a:extLst>
           </p:cNvPr>
@@ -11406,7 +11606,7 @@
           <p:nvPr/>
         </p:nvPicPr>
         <p:blipFill>
-          <a:blip xmlns:r="http://schemas.openxmlformats.org/officeDocument/2006/relationships" xmlns:a="http://schemas.openxmlformats.org/drawingml/2006/main" r:embed="R93135260e236415a"/>
+          <a:blip xmlns:r="http://schemas.openxmlformats.org/officeDocument/2006/relationships" xmlns:a="http://schemas.openxmlformats.org/drawingml/2006/main" r:embed="R105f639988f54dd4"/>
           <a:stretch xmlns:a="http://schemas.openxmlformats.org/drawingml/2006/main"/>
         </p:blipFill>
         <p:spPr>
@@ -11424,7 +11624,7 @@
           <p:cNvPr id="11" name="">
             <a:extLst xmlns:a="http://schemas.openxmlformats.org/drawingml/2006/main">
               <a:ext uri="{FF2B5EF4-FFF2-40B4-BE49-F238E27FC236}">
-                <a16:creationId xmlns:a16="http://schemas.microsoft.com/office/drawing/2014/main" id="{B1CB2333-68EB-486A-AFFF-88522803BBC3}"/>
+                <a16:creationId xmlns:a16="http://schemas.microsoft.com/office/drawing/2014/main" id="{A03E11F0-241D-4B4A-A3DC-87E6D03D77F6}"/>
               </a:ext>
             </a:extLst>
           </p:cNvPr>
@@ -11481,7 +11681,7 @@
           <p:cNvPr id="12" name="">
             <a:extLst xmlns:a="http://schemas.openxmlformats.org/drawingml/2006/main">
               <a:ext uri="{FF2B5EF4-FFF2-40B4-BE49-F238E27FC236}">
-                <a16:creationId xmlns:a16="http://schemas.microsoft.com/office/drawing/2014/main" id="{7C586340-D6DE-4923-9CDF-C1144A97C9E6}"/>
+                <a16:creationId xmlns:a16="http://schemas.microsoft.com/office/drawing/2014/main" id="{F61F9439-AB17-4C8F-A193-902A746FC38D}"/>
               </a:ext>
             </a:extLst>
           </p:cNvPr>
@@ -11538,7 +11738,7 @@
           <p:cNvPr id="13" name="">
             <a:extLst xmlns:a="http://schemas.openxmlformats.org/drawingml/2006/main">
               <a:ext uri="{FF2B5EF4-FFF2-40B4-BE49-F238E27FC236}">
-                <a16:creationId xmlns:a16="http://schemas.microsoft.com/office/drawing/2014/main" id="{252A48CD-18E8-482A-A3D3-E707E6F606CE}"/>
+                <a16:creationId xmlns:a16="http://schemas.microsoft.com/office/drawing/2014/main" id="{299554A4-A73C-49BA-8FBB-3C57B02D6BC5}"/>
               </a:ext>
             </a:extLst>
           </p:cNvPr>
@@ -11570,7 +11770,7 @@
           <p:cNvPr id="14" name="">
             <a:extLst xmlns:a="http://schemas.openxmlformats.org/drawingml/2006/main">
               <a:ext uri="{FF2B5EF4-FFF2-40B4-BE49-F238E27FC236}">
-                <a16:creationId xmlns:a16="http://schemas.microsoft.com/office/drawing/2014/main" id="{211D42EF-BA0C-4F78-9020-EF75B0B40A63}"/>
+                <a16:creationId xmlns:a16="http://schemas.microsoft.com/office/drawing/2014/main" id="{AF04F8BF-AA39-4678-8885-BA7379266C44}"/>
               </a:ext>
             </a:extLst>
           </p:cNvPr>
@@ -11627,7 +11827,7 @@
           <p:cNvPr id="15" name="">
             <a:extLst xmlns:a="http://schemas.openxmlformats.org/drawingml/2006/main">
               <a:ext uri="{FF2B5EF4-FFF2-40B4-BE49-F238E27FC236}">
-                <a16:creationId xmlns:a16="http://schemas.microsoft.com/office/drawing/2014/main" id="{6EF11551-D9CE-40DC-94EA-5AA7C8A9B2EF}"/>
+                <a16:creationId xmlns:a16="http://schemas.microsoft.com/office/drawing/2014/main" id="{B917613D-B3D4-482D-A345-8E0890FC209F}"/>
               </a:ext>
             </a:extLst>
           </p:cNvPr>
@@ -11682,7 +11882,7 @@
     </p:spTree>
     <p:extLst>
       <p:ext uri="{BB962C8B-B14F-4D97-AF65-F5344CB8AC3E}">
-        <p14:creationId xmlns:p14="http://schemas.microsoft.com/office/powerpoint/2010/main" val="2073037071"/>
+        <p14:creationId xmlns:p14="http://schemas.microsoft.com/office/powerpoint/2010/main" val="676760846"/>
       </p:ext>
     </p:extLst>
   </p:cSld>
@@ -11837,7 +12037,7 @@
           <p:cNvPr id="23" name="">
             <a:extLst xmlns:a="http://schemas.openxmlformats.org/drawingml/2006/main">
               <a:ext uri="{FF2B5EF4-FFF2-40B4-BE49-F238E27FC236}">
-                <a16:creationId xmlns:a16="http://schemas.microsoft.com/office/drawing/2014/main" id="{DA655258-0E9E-4767-8300-D6E8806101E3}"/>
+                <a16:creationId xmlns:a16="http://schemas.microsoft.com/office/drawing/2014/main" id="{11FAD936-5881-46DE-A372-6CCF0BB48F8A}"/>
               </a:ext>
             </a:extLst>
           </p:cNvPr>
@@ -11869,7 +12069,7 @@
           <p:cNvPr id="2" name="">
             <a:extLst xmlns:a="http://schemas.openxmlformats.org/drawingml/2006/main">
               <a:ext uri="{FF2B5EF4-FFF2-40B4-BE49-F238E27FC236}">
-                <a16:creationId xmlns:a16="http://schemas.microsoft.com/office/drawing/2014/main" id="{FBEA4F5E-7130-4A83-B9F7-56D294A10B2C}"/>
+                <a16:creationId xmlns:a16="http://schemas.microsoft.com/office/drawing/2014/main" id="{1518EB79-DF52-4D42-B186-1F4DFDC03A70}"/>
               </a:ext>
             </a:extLst>
           </p:cNvPr>
@@ -11926,7 +12126,7 @@
           <p:cNvPr id="3" name="">
             <a:extLst xmlns:a="http://schemas.openxmlformats.org/drawingml/2006/main">
               <a:ext uri="{FF2B5EF4-FFF2-40B4-BE49-F238E27FC236}">
-                <a16:creationId xmlns:a16="http://schemas.microsoft.com/office/drawing/2014/main" id="{086E04F5-D5A1-4CC1-A0FE-B0DFE02AF3B0}"/>
+                <a16:creationId xmlns:a16="http://schemas.microsoft.com/office/drawing/2014/main" id="{42E8DABA-9244-4697-9C88-708B9C9169CC}"/>
               </a:ext>
             </a:extLst>
           </p:cNvPr>
@@ -11958,7 +12158,7 @@
           <p:cNvPr id="4" name="">
             <a:extLst xmlns:a="http://schemas.openxmlformats.org/drawingml/2006/main">
               <a:ext uri="{FF2B5EF4-FFF2-40B4-BE49-F238E27FC236}">
-                <a16:creationId xmlns:a16="http://schemas.microsoft.com/office/drawing/2014/main" id="{F554EFCA-1780-40AC-8721-45FEC5FAB794}"/>
+                <a16:creationId xmlns:a16="http://schemas.microsoft.com/office/drawing/2014/main" id="{3507CA00-21A0-4F91-913B-9D613164D730}"/>
               </a:ext>
             </a:extLst>
           </p:cNvPr>
@@ -12015,7 +12215,7 @@
           <p:cNvPr id="5" name="">
             <a:extLst xmlns:a="http://schemas.openxmlformats.org/drawingml/2006/main">
               <a:ext uri="{FF2B5EF4-FFF2-40B4-BE49-F238E27FC236}">
-                <a16:creationId xmlns:a16="http://schemas.microsoft.com/office/drawing/2014/main" id="{1323DE9A-87B1-4E41-AFC1-6632F733EBDF}"/>
+                <a16:creationId xmlns:a16="http://schemas.microsoft.com/office/drawing/2014/main" id="{810117AB-99D9-4A97-8576-4FF3FA1DECE9}"/>
               </a:ext>
             </a:extLst>
           </p:cNvPr>
@@ -12072,7 +12272,7 @@
           <p:cNvPr id="6" name="">
             <a:extLst xmlns:a="http://schemas.openxmlformats.org/drawingml/2006/main">
               <a:ext uri="{FF2B5EF4-FFF2-40B4-BE49-F238E27FC236}">
-                <a16:creationId xmlns:a16="http://schemas.microsoft.com/office/drawing/2014/main" id="{ED41BCD0-ACFD-46F6-AA2B-F2BEE4A60AAE}"/>
+                <a16:creationId xmlns:a16="http://schemas.microsoft.com/office/drawing/2014/main" id="{BFD5A0EA-8B2F-4552-AB78-FEE5CBB7B366}"/>
               </a:ext>
             </a:extLst>
           </p:cNvPr>
@@ -12129,7 +12329,7 @@
           <p:cNvPr id="7" name="">
             <a:extLst xmlns:a="http://schemas.openxmlformats.org/drawingml/2006/main">
               <a:ext uri="{FF2B5EF4-FFF2-40B4-BE49-F238E27FC236}">
-                <a16:creationId xmlns:a16="http://schemas.microsoft.com/office/drawing/2014/main" id="{A8F906DC-E290-4C12-8E82-B1D483E18B01}"/>
+                <a16:creationId xmlns:a16="http://schemas.microsoft.com/office/drawing/2014/main" id="{B179E87C-E9C1-41E8-977E-FC0DDEBCED36}"/>
               </a:ext>
             </a:extLst>
           </p:cNvPr>
@@ -12161,7 +12361,7 @@
           <p:cNvPr id="8" name="">
             <a:extLst xmlns:a="http://schemas.openxmlformats.org/drawingml/2006/main">
               <a:ext uri="{FF2B5EF4-FFF2-40B4-BE49-F238E27FC236}">
-                <a16:creationId xmlns:a16="http://schemas.microsoft.com/office/drawing/2014/main" id="{B033F165-DE57-4311-8E02-F1171CCCCC6D}"/>
+                <a16:creationId xmlns:a16="http://schemas.microsoft.com/office/drawing/2014/main" id="{B396C4BE-ABC1-410D-A902-CD73AC1C9CEF}"/>
               </a:ext>
             </a:extLst>
           </p:cNvPr>
@@ -12218,7 +12418,7 @@
           <p:cNvPr id="9" name="">
             <a:extLst xmlns:a="http://schemas.openxmlformats.org/drawingml/2006/main">
               <a:ext uri="{FF2B5EF4-FFF2-40B4-BE49-F238E27FC236}">
-                <a16:creationId xmlns:a16="http://schemas.microsoft.com/office/drawing/2014/main" id="{8763D790-8B21-4255-A830-E3D20F38D37F}"/>
+                <a16:creationId xmlns:a16="http://schemas.microsoft.com/office/drawing/2014/main" id="{C7CE0FDC-38B1-4F53-A954-5D2B027B3B29}"/>
               </a:ext>
             </a:extLst>
           </p:cNvPr>
@@ -12275,7 +12475,7 @@
           <p:cNvPr id="10" name="">
             <a:extLst xmlns:a="http://schemas.openxmlformats.org/drawingml/2006/main">
               <a:ext uri="{FF2B5EF4-FFF2-40B4-BE49-F238E27FC236}">
-                <a16:creationId xmlns:a16="http://schemas.microsoft.com/office/drawing/2014/main" id="{3EDC2C96-462E-410F-9BD9-77C78A9572B7}"/>
+                <a16:creationId xmlns:a16="http://schemas.microsoft.com/office/drawing/2014/main" id="{20062B4A-DA05-41A4-972A-461EBF90955C}"/>
               </a:ext>
             </a:extLst>
           </p:cNvPr>
@@ -12309,7 +12509,7 @@
           <p:cNvPr id="11" name="">
             <a:extLst xmlns:a="http://schemas.openxmlformats.org/drawingml/2006/main">
               <a:ext uri="{FF2B5EF4-FFF2-40B4-BE49-F238E27FC236}">
-                <a16:creationId xmlns:a16="http://schemas.microsoft.com/office/drawing/2014/main" id="{723C577C-B25E-4F26-AD50-1DBAEB554478}"/>
+                <a16:creationId xmlns:a16="http://schemas.microsoft.com/office/drawing/2014/main" id="{4EA5EC0B-ACDF-461F-A94E-A7292D116FFC}"/>
               </a:ext>
             </a:extLst>
           </p:cNvPr>
@@ -12341,7 +12541,7 @@
           <p:cNvPr id="12" name="">
             <a:extLst xmlns:a="http://schemas.openxmlformats.org/drawingml/2006/main">
               <a:ext uri="{FF2B5EF4-FFF2-40B4-BE49-F238E27FC236}">
-                <a16:creationId xmlns:a16="http://schemas.microsoft.com/office/drawing/2014/main" id="{3304A825-9730-4648-A9B1-AD2427FB08BB}"/>
+                <a16:creationId xmlns:a16="http://schemas.microsoft.com/office/drawing/2014/main" id="{D6260594-741A-47C2-B424-8D0CD019DEB3}"/>
               </a:ext>
             </a:extLst>
           </p:cNvPr>
@@ -12398,7 +12598,7 @@
           <p:cNvPr id="13" name="">
             <a:extLst xmlns:a="http://schemas.openxmlformats.org/drawingml/2006/main">
               <a:ext uri="{FF2B5EF4-FFF2-40B4-BE49-F238E27FC236}">
-                <a16:creationId xmlns:a16="http://schemas.microsoft.com/office/drawing/2014/main" id="{260DAD6D-8A74-4140-9484-0EC0CE818099}"/>
+                <a16:creationId xmlns:a16="http://schemas.microsoft.com/office/drawing/2014/main" id="{6CEFF410-851E-4DD2-95B3-EF52788E725E}"/>
               </a:ext>
             </a:extLst>
           </p:cNvPr>
@@ -12455,7 +12655,7 @@
           <p:cNvPr id="14" name="">
             <a:extLst xmlns:a="http://schemas.openxmlformats.org/drawingml/2006/main">
               <a:ext uri="{FF2B5EF4-FFF2-40B4-BE49-F238E27FC236}">
-                <a16:creationId xmlns:a16="http://schemas.microsoft.com/office/drawing/2014/main" id="{209B9E4B-54EE-4EDD-9418-E02FF8B2D57C}"/>
+                <a16:creationId xmlns:a16="http://schemas.microsoft.com/office/drawing/2014/main" id="{CD3DA264-B525-4A40-8804-3DB082623901}"/>
               </a:ext>
             </a:extLst>
           </p:cNvPr>
@@ -12489,7 +12689,7 @@
           <p:cNvPr id="15" name="">
             <a:extLst xmlns:a="http://schemas.openxmlformats.org/drawingml/2006/main">
               <a:ext uri="{FF2B5EF4-FFF2-40B4-BE49-F238E27FC236}">
-                <a16:creationId xmlns:a16="http://schemas.microsoft.com/office/drawing/2014/main" id="{BCF9AEF1-AD0C-436A-B1B2-99D0014CF0D8}"/>
+                <a16:creationId xmlns:a16="http://schemas.microsoft.com/office/drawing/2014/main" id="{4FF5F139-5B1F-41A2-B9AE-AD13FFE456CE}"/>
               </a:ext>
             </a:extLst>
           </p:cNvPr>
@@ -12521,7 +12721,7 @@
           <p:cNvPr id="16" name="">
             <a:extLst xmlns:a="http://schemas.openxmlformats.org/drawingml/2006/main">
               <a:ext uri="{FF2B5EF4-FFF2-40B4-BE49-F238E27FC236}">
-                <a16:creationId xmlns:a16="http://schemas.microsoft.com/office/drawing/2014/main" id="{3834BFAA-13D4-48C5-BBFE-CF1DF5308AE2}"/>
+                <a16:creationId xmlns:a16="http://schemas.microsoft.com/office/drawing/2014/main" id="{3DF07911-6669-4EFE-9011-71059BA3DB7E}"/>
               </a:ext>
             </a:extLst>
           </p:cNvPr>
@@ -12578,7 +12778,7 @@
           <p:cNvPr id="17" name="">
             <a:extLst xmlns:a="http://schemas.openxmlformats.org/drawingml/2006/main">
               <a:ext uri="{FF2B5EF4-FFF2-40B4-BE49-F238E27FC236}">
-                <a16:creationId xmlns:a16="http://schemas.microsoft.com/office/drawing/2014/main" id="{DF9A7FAA-A648-49F2-BE23-7152D878A6D8}"/>
+                <a16:creationId xmlns:a16="http://schemas.microsoft.com/office/drawing/2014/main" id="{873671A2-9BB8-4594-B759-D1A0273D0EB9}"/>
               </a:ext>
             </a:extLst>
           </p:cNvPr>
@@ -12635,7 +12835,7 @@
           <p:cNvPr id="18" name="">
             <a:extLst xmlns:a="http://schemas.openxmlformats.org/drawingml/2006/main">
               <a:ext uri="{FF2B5EF4-FFF2-40B4-BE49-F238E27FC236}">
-                <a16:creationId xmlns:a16="http://schemas.microsoft.com/office/drawing/2014/main" id="{64681488-1BD9-4B3E-8F4B-8487CA1004D4}"/>
+                <a16:creationId xmlns:a16="http://schemas.microsoft.com/office/drawing/2014/main" id="{BB1637C1-DDB3-4CAE-8E61-4CAF2C81DD38}"/>
               </a:ext>
             </a:extLst>
           </p:cNvPr>
@@ -12669,7 +12869,7 @@
           <p:cNvPr id="19" name="">
             <a:extLst xmlns:a="http://schemas.openxmlformats.org/drawingml/2006/main">
               <a:ext uri="{FF2B5EF4-FFF2-40B4-BE49-F238E27FC236}">
-                <a16:creationId xmlns:a16="http://schemas.microsoft.com/office/drawing/2014/main" id="{29CE09F7-E5C8-491A-AACF-24A13BE66BC8}"/>
+                <a16:creationId xmlns:a16="http://schemas.microsoft.com/office/drawing/2014/main" id="{CF029B2B-5538-46CF-A26E-31E9A4BFDA79}"/>
               </a:ext>
             </a:extLst>
           </p:cNvPr>
@@ -12701,7 +12901,7 @@
           <p:cNvPr id="20" name="">
             <a:extLst xmlns:a="http://schemas.openxmlformats.org/drawingml/2006/main">
               <a:ext uri="{FF2B5EF4-FFF2-40B4-BE49-F238E27FC236}">
-                <a16:creationId xmlns:a16="http://schemas.microsoft.com/office/drawing/2014/main" id="{50D0D231-93B2-4475-B2D9-609AEB678BA1}"/>
+                <a16:creationId xmlns:a16="http://schemas.microsoft.com/office/drawing/2014/main" id="{E5F5A54D-483B-4C72-A879-D8E66540BE98}"/>
               </a:ext>
             </a:extLst>
           </p:cNvPr>
@@ -12758,7 +12958,7 @@
           <p:cNvPr id="21" name="">
             <a:extLst xmlns:a="http://schemas.openxmlformats.org/drawingml/2006/main">
               <a:ext uri="{FF2B5EF4-FFF2-40B4-BE49-F238E27FC236}">
-                <a16:creationId xmlns:a16="http://schemas.microsoft.com/office/drawing/2014/main" id="{930D99A8-97B7-4FBC-A131-EDEE015CB049}"/>
+                <a16:creationId xmlns:a16="http://schemas.microsoft.com/office/drawing/2014/main" id="{60E4A5B6-4614-4C76-A60D-7CFF80434B36}"/>
               </a:ext>
             </a:extLst>
           </p:cNvPr>
@@ -12815,7 +13015,7 @@
           <p:cNvPr id="22" name="">
             <a:extLst xmlns:a="http://schemas.openxmlformats.org/drawingml/2006/main">
               <a:ext uri="{FF2B5EF4-FFF2-40B4-BE49-F238E27FC236}">
-                <a16:creationId xmlns:a16="http://schemas.microsoft.com/office/drawing/2014/main" id="{E56797A1-D094-4E17-8900-AD47AC18AA0E}"/>
+                <a16:creationId xmlns:a16="http://schemas.microsoft.com/office/drawing/2014/main" id="{93CB1EA6-3DA4-4041-8D97-3641DF9BCB4A}"/>
               </a:ext>
             </a:extLst>
           </p:cNvPr>
@@ -12870,7 +13070,7 @@
     </p:spTree>
     <p:extLst>
       <p:ext uri="{BB962C8B-B14F-4D97-AF65-F5344CB8AC3E}">
-        <p14:creationId xmlns:p14="http://schemas.microsoft.com/office/powerpoint/2010/main" val="1675961082"/>
+        <p14:creationId xmlns:p14="http://schemas.microsoft.com/office/powerpoint/2010/main" val="1684507611"/>
       </p:ext>
     </p:extLst>
   </p:cSld>
@@ -13071,7 +13271,7 @@
           <p:cNvPr id="22" name="">
             <a:extLst xmlns:a="http://schemas.openxmlformats.org/drawingml/2006/main">
               <a:ext uri="{FF2B5EF4-FFF2-40B4-BE49-F238E27FC236}">
-                <a16:creationId xmlns:a16="http://schemas.microsoft.com/office/drawing/2014/main" id="{67F55D57-C4AF-4C8B-A0E6-0182696EF707}"/>
+                <a16:creationId xmlns:a16="http://schemas.microsoft.com/office/drawing/2014/main" id="{A12785AE-F2CC-4F3A-BB1B-A72F2BD91CF8}"/>
               </a:ext>
             </a:extLst>
           </p:cNvPr>
@@ -13103,7 +13303,7 @@
           <p:cNvPr id="2" name="">
             <a:extLst xmlns:a="http://schemas.openxmlformats.org/drawingml/2006/main">
               <a:ext uri="{FF2B5EF4-FFF2-40B4-BE49-F238E27FC236}">
-                <a16:creationId xmlns:a16="http://schemas.microsoft.com/office/drawing/2014/main" id="{DE2EF694-46D4-481A-B852-F8641B753663}"/>
+                <a16:creationId xmlns:a16="http://schemas.microsoft.com/office/drawing/2014/main" id="{BAD30BBE-70C9-4DBF-9691-D3530F637014}"/>
               </a:ext>
             </a:extLst>
           </p:cNvPr>
@@ -13160,7 +13360,7 @@
           <p:cNvPr id="3" name="">
             <a:extLst xmlns:a="http://schemas.openxmlformats.org/drawingml/2006/main">
               <a:ext uri="{FF2B5EF4-FFF2-40B4-BE49-F238E27FC236}">
-                <a16:creationId xmlns:a16="http://schemas.microsoft.com/office/drawing/2014/main" id="{C121A0BB-4F99-4707-A7B6-B174A54DCBA6}"/>
+                <a16:creationId xmlns:a16="http://schemas.microsoft.com/office/drawing/2014/main" id="{E820B13A-B43A-4E33-820D-294101EC554C}"/>
               </a:ext>
             </a:extLst>
           </p:cNvPr>
@@ -13192,7 +13392,7 @@
           <p:cNvPr id="4" name="">
             <a:extLst xmlns:a="http://schemas.openxmlformats.org/drawingml/2006/main">
               <a:ext uri="{FF2B5EF4-FFF2-40B4-BE49-F238E27FC236}">
-                <a16:creationId xmlns:a16="http://schemas.microsoft.com/office/drawing/2014/main" id="{28FAE5D1-8C63-4D73-A0D1-DD02ED6272BD}"/>
+                <a16:creationId xmlns:a16="http://schemas.microsoft.com/office/drawing/2014/main" id="{5BFCEED9-D633-46AF-BF48-D72C00C0194B}"/>
               </a:ext>
             </a:extLst>
           </p:cNvPr>
@@ -13249,7 +13449,7 @@
           <p:cNvPr id="5" name="">
             <a:extLst xmlns:a="http://schemas.openxmlformats.org/drawingml/2006/main">
               <a:ext uri="{FF2B5EF4-FFF2-40B4-BE49-F238E27FC236}">
-                <a16:creationId xmlns:a16="http://schemas.microsoft.com/office/drawing/2014/main" id="{1A016F05-3EDE-447A-8471-F609CFE4C467}"/>
+                <a16:creationId xmlns:a16="http://schemas.microsoft.com/office/drawing/2014/main" id="{78060C41-CD17-475C-B6A1-926F1D7C5485}"/>
               </a:ext>
             </a:extLst>
           </p:cNvPr>
@@ -13306,7 +13506,7 @@
           <p:cNvPr id="6" name="">
             <a:extLst xmlns:a="http://schemas.openxmlformats.org/drawingml/2006/main">
               <a:ext uri="{FF2B5EF4-FFF2-40B4-BE49-F238E27FC236}">
-                <a16:creationId xmlns:a16="http://schemas.microsoft.com/office/drawing/2014/main" id="{7B690B9D-B603-42E6-9999-1AEE26B92300}"/>
+                <a16:creationId xmlns:a16="http://schemas.microsoft.com/office/drawing/2014/main" id="{A3F228D0-7A5D-40A7-96EF-511B5C4C5188}"/>
               </a:ext>
             </a:extLst>
           </p:cNvPr>
@@ -13363,7 +13563,7 @@
           <p:cNvPr id="7" name="">
             <a:extLst xmlns:a="http://schemas.openxmlformats.org/drawingml/2006/main">
               <a:ext uri="{FF2B5EF4-FFF2-40B4-BE49-F238E27FC236}">
-                <a16:creationId xmlns:a16="http://schemas.microsoft.com/office/drawing/2014/main" id="{62FE834E-8452-41E1-A229-1368DB2F1584}"/>
+                <a16:creationId xmlns:a16="http://schemas.microsoft.com/office/drawing/2014/main" id="{B66A26B3-70E2-4C21-A267-C575D651AAAF}"/>
               </a:ext>
             </a:extLst>
           </p:cNvPr>
@@ -13395,7 +13595,7 @@
           <p:cNvPr id="8" name="">
             <a:extLst xmlns:a="http://schemas.openxmlformats.org/drawingml/2006/main">
               <a:ext uri="{FF2B5EF4-FFF2-40B4-BE49-F238E27FC236}">
-                <a16:creationId xmlns:a16="http://schemas.microsoft.com/office/drawing/2014/main" id="{D0B6DA46-279E-41CF-B731-A228B4BDA0E5}"/>
+                <a16:creationId xmlns:a16="http://schemas.microsoft.com/office/drawing/2014/main" id="{D22E43E3-8DC2-4C8B-8DD1-EE9A975C0DF0}"/>
               </a:ext>
             </a:extLst>
           </p:cNvPr>
@@ -13452,7 +13652,7 @@
           <p:cNvPr id="9" name="">
             <a:extLst xmlns:a="http://schemas.openxmlformats.org/drawingml/2006/main">
               <a:ext uri="{FF2B5EF4-FFF2-40B4-BE49-F238E27FC236}">
-                <a16:creationId xmlns:a16="http://schemas.microsoft.com/office/drawing/2014/main" id="{7D32AD8D-1C84-41F2-A312-8FAE2D3FF54B}"/>
+                <a16:creationId xmlns:a16="http://schemas.microsoft.com/office/drawing/2014/main" id="{1CADBA84-027D-42B0-AA09-8A5E035B1E95}"/>
               </a:ext>
             </a:extLst>
           </p:cNvPr>
@@ -13509,7 +13709,7 @@
           <p:cNvPr id="10" name="">
             <a:extLst xmlns:a="http://schemas.openxmlformats.org/drawingml/2006/main">
               <a:ext uri="{FF2B5EF4-FFF2-40B4-BE49-F238E27FC236}">
-                <a16:creationId xmlns:a16="http://schemas.microsoft.com/office/drawing/2014/main" id="{2ED986DE-56ED-4D98-94E4-10F4DA5961D3}"/>
+                <a16:creationId xmlns:a16="http://schemas.microsoft.com/office/drawing/2014/main" id="{9B84264E-736F-49C1-A1EB-FDF187FC2860}"/>
               </a:ext>
             </a:extLst>
           </p:cNvPr>
@@ -13543,7 +13743,7 @@
           <p:cNvPr id="11" name="">
             <a:extLst xmlns:a="http://schemas.openxmlformats.org/drawingml/2006/main">
               <a:ext uri="{FF2B5EF4-FFF2-40B4-BE49-F238E27FC236}">
-                <a16:creationId xmlns:a16="http://schemas.microsoft.com/office/drawing/2014/main" id="{CDD4E2A8-0B66-40D3-BA40-A9F9FD55BF49}"/>
+                <a16:creationId xmlns:a16="http://schemas.microsoft.com/office/drawing/2014/main" id="{FEEECBE6-A421-484D-8D88-2947A17B056D}"/>
               </a:ext>
             </a:extLst>
           </p:cNvPr>
@@ -13575,7 +13775,7 @@
           <p:cNvPr id="12" name="">
             <a:extLst xmlns:a="http://schemas.openxmlformats.org/drawingml/2006/main">
               <a:ext uri="{FF2B5EF4-FFF2-40B4-BE49-F238E27FC236}">
-                <a16:creationId xmlns:a16="http://schemas.microsoft.com/office/drawing/2014/main" id="{DE39302F-44FA-4E4F-BC80-6EE5E7AC181D}"/>
+                <a16:creationId xmlns:a16="http://schemas.microsoft.com/office/drawing/2014/main" id="{39FC55BF-B3C0-485B-83EE-F01D264477B9}"/>
               </a:ext>
             </a:extLst>
           </p:cNvPr>
@@ -13632,7 +13832,7 @@
           <p:cNvPr id="13" name="">
             <a:extLst xmlns:a="http://schemas.openxmlformats.org/drawingml/2006/main">
               <a:ext uri="{FF2B5EF4-FFF2-40B4-BE49-F238E27FC236}">
-                <a16:creationId xmlns:a16="http://schemas.microsoft.com/office/drawing/2014/main" id="{2BBEBC48-64BF-4F18-B226-9EEE4F78BBFF}"/>
+                <a16:creationId xmlns:a16="http://schemas.microsoft.com/office/drawing/2014/main" id="{61CA01CB-A7DA-4B71-A61B-7B8E49BDEE76}"/>
               </a:ext>
             </a:extLst>
           </p:cNvPr>
@@ -13689,7 +13889,7 @@
           <p:cNvPr id="14" name="">
             <a:extLst xmlns:a="http://schemas.openxmlformats.org/drawingml/2006/main">
               <a:ext uri="{FF2B5EF4-FFF2-40B4-BE49-F238E27FC236}">
-                <a16:creationId xmlns:a16="http://schemas.microsoft.com/office/drawing/2014/main" id="{B5DD0CFA-5280-43ED-8D34-2E497593137D}"/>
+                <a16:creationId xmlns:a16="http://schemas.microsoft.com/office/drawing/2014/main" id="{B20A550F-98CD-4747-9E7E-AAECB12F32A5}"/>
               </a:ext>
             </a:extLst>
           </p:cNvPr>
@@ -13723,7 +13923,7 @@
           <p:cNvPr id="15" name="">
             <a:extLst xmlns:a="http://schemas.openxmlformats.org/drawingml/2006/main">
               <a:ext uri="{FF2B5EF4-FFF2-40B4-BE49-F238E27FC236}">
-                <a16:creationId xmlns:a16="http://schemas.microsoft.com/office/drawing/2014/main" id="{D09B628D-8D20-4479-A327-69CBB76AF9D4}"/>
+                <a16:creationId xmlns:a16="http://schemas.microsoft.com/office/drawing/2014/main" id="{66DFA215-F42E-4234-99C1-B84E42A57090}"/>
               </a:ext>
             </a:extLst>
           </p:cNvPr>
@@ -13755,7 +13955,7 @@
           <p:cNvPr id="16" name="">
             <a:extLst xmlns:a="http://schemas.openxmlformats.org/drawingml/2006/main">
               <a:ext uri="{FF2B5EF4-FFF2-40B4-BE49-F238E27FC236}">
-                <a16:creationId xmlns:a16="http://schemas.microsoft.com/office/drawing/2014/main" id="{3CFF865C-5A0D-414B-886F-5BA15E6786A6}"/>
+                <a16:creationId xmlns:a16="http://schemas.microsoft.com/office/drawing/2014/main" id="{61579132-343B-45A6-8323-D917BF9E536E}"/>
               </a:ext>
             </a:extLst>
           </p:cNvPr>
@@ -13812,7 +14012,7 @@
           <p:cNvPr id="17" name="">
             <a:extLst xmlns:a="http://schemas.openxmlformats.org/drawingml/2006/main">
               <a:ext uri="{FF2B5EF4-FFF2-40B4-BE49-F238E27FC236}">
-                <a16:creationId xmlns:a16="http://schemas.microsoft.com/office/drawing/2014/main" id="{B1E2204F-FBFD-418A-9EC1-BA18397D3A20}"/>
+                <a16:creationId xmlns:a16="http://schemas.microsoft.com/office/drawing/2014/main" id="{FC4095C6-F05A-4342-82C3-60802E37BBED}"/>
               </a:ext>
             </a:extLst>
           </p:cNvPr>
@@ -13869,7 +14069,7 @@
           <p:cNvPr id="18" name="">
             <a:extLst xmlns:a="http://schemas.openxmlformats.org/drawingml/2006/main">
               <a:ext uri="{FF2B5EF4-FFF2-40B4-BE49-F238E27FC236}">
-                <a16:creationId xmlns:a16="http://schemas.microsoft.com/office/drawing/2014/main" id="{197E4AE8-4B1C-41A2-9C65-ABD6F5FC15CF}"/>
+                <a16:creationId xmlns:a16="http://schemas.microsoft.com/office/drawing/2014/main" id="{82358921-2996-4194-B842-12468F66EDE9}"/>
               </a:ext>
             </a:extLst>
           </p:cNvPr>
@@ -13903,7 +14103,7 @@
           <p:cNvPr id="19" name="">
             <a:extLst xmlns:a="http://schemas.openxmlformats.org/drawingml/2006/main">
               <a:ext uri="{FF2B5EF4-FFF2-40B4-BE49-F238E27FC236}">
-                <a16:creationId xmlns:a16="http://schemas.microsoft.com/office/drawing/2014/main" id="{F3871C6E-3D1C-432C-8F3C-2C3072FFD7F6}"/>
+                <a16:creationId xmlns:a16="http://schemas.microsoft.com/office/drawing/2014/main" id="{3E2377B1-D00E-497C-899C-CAB5F40266BD}"/>
               </a:ext>
             </a:extLst>
           </p:cNvPr>
@@ -13935,7 +14135,7 @@
           <p:cNvPr id="20" name="">
             <a:extLst xmlns:a="http://schemas.openxmlformats.org/drawingml/2006/main">
               <a:ext uri="{FF2B5EF4-FFF2-40B4-BE49-F238E27FC236}">
-                <a16:creationId xmlns:a16="http://schemas.microsoft.com/office/drawing/2014/main" id="{DBC39173-36D1-41D7-8F32-76EA46C98C7B}"/>
+                <a16:creationId xmlns:a16="http://schemas.microsoft.com/office/drawing/2014/main" id="{5481E8F9-3F65-410C-ADAE-F07E441200E5}"/>
               </a:ext>
             </a:extLst>
           </p:cNvPr>
@@ -13992,7 +14192,7 @@
           <p:cNvPr id="21" name="">
             <a:extLst xmlns:a="http://schemas.openxmlformats.org/drawingml/2006/main">
               <a:ext uri="{FF2B5EF4-FFF2-40B4-BE49-F238E27FC236}">
-                <a16:creationId xmlns:a16="http://schemas.microsoft.com/office/drawing/2014/main" id="{8B08CAE7-6A77-4429-BE1D-A7EDA30F34FC}"/>
+                <a16:creationId xmlns:a16="http://schemas.microsoft.com/office/drawing/2014/main" id="{53C1A81B-2C08-4D87-8B21-3D5A365EB4AB}"/>
               </a:ext>
             </a:extLst>
           </p:cNvPr>
@@ -14047,7 +14247,7 @@
     </p:spTree>
     <p:extLst>
       <p:ext uri="{BB962C8B-B14F-4D97-AF65-F5344CB8AC3E}">
-        <p14:creationId xmlns:p14="http://schemas.microsoft.com/office/powerpoint/2010/main" val="480812041"/>
+        <p14:creationId xmlns:p14="http://schemas.microsoft.com/office/powerpoint/2010/main" val="1964554097"/>
       </p:ext>
     </p:extLst>
   </p:cSld>
